--- a/lecons/F2T/14_S08_L3_P4_Desert_Problems_Adaptations.pptx
+++ b/lecons/F2T/14_S08_L3_P4_Desert_Problems_Adaptations.pptx
@@ -57,9 +57,12 @@
     <p:sldId id="305" r:id="rId51"/>
     <p:sldId id="306" r:id="rId52"/>
     <p:sldId id="307" r:id="rId53"/>
+    <p:sldId id="308" r:id="rId54"/>
+    <p:sldId id="309" r:id="rId55"/>
+    <p:sldId id="310" r:id="rId56"/>
   </p:sldIdLst>
   <p:notesMasterIdLst>
-    <p:notesMasterId r:id="rId54"/>
+    <p:notesMasterId r:id="rId57"/>
   </p:notesMasterIdLst>
   <p:sldSz cx="12192000" cy="6858000"/>
   <p:notesSz cx="6858000" cy="12192000"/>
@@ -641,7 +644,7 @@
           <a:p>
             <a:r>
               <a:rPr lang="en-US" dirty="0"/>
-              <a:t>Listen carefully to this situation from real life. A Tuareg family lives in the Sahara, in Niger. Their well is dry, and there is no grass for their camels and goats. The father must decide what to do. Think about it, because I am going to ask you some questions.</a:t>
+              <a:t>Listen carefully to this situation from real life. A Tuareg family lives in the Sahara, in Niger. Their well is dry, and there is no grass for their camels and goats. The father asks: "How can my family survive in this hard place?" Think about it, because I am going to ask you some questions.</a:t>
             </a:r>
             <a:endParaRPr lang="en-US" dirty="0"/>
           </a:p>
@@ -817,7 +820,7 @@
           <a:p>
             <a:r>
               <a:rPr lang="en-US" dirty="0"/>
-              <a:t>Good. The family has no water and no grass for the animals.</a:t>
+              <a:t>Good. The family lacks water and grass and must adapt to survive.</a:t>
             </a:r>
             <a:endParaRPr lang="en-US" dirty="0"/>
           </a:p>
@@ -905,7 +908,7 @@
           <a:p>
             <a:r>
               <a:rPr lang="en-US" dirty="0"/>
-              <a:t>Question 2: What can the father do? Think for a moment, then raise your hand to answer.</a:t>
+              <a:t>Question 2: Where does the family live? Think for a moment, then raise your hand to answer.</a:t>
             </a:r>
             <a:endParaRPr lang="en-US" dirty="0"/>
           </a:p>
@@ -993,7 +996,7 @@
           <a:p>
             <a:r>
               <a:rPr lang="en-US" dirty="0"/>
-              <a:t>Good. He can move with his animals to another well.</a:t>
+              <a:t>Good. In the Sahara, in Niger.</a:t>
             </a:r>
             <a:endParaRPr lang="en-US" dirty="0"/>
           </a:p>
@@ -1081,7 +1084,7 @@
           <a:p>
             <a:r>
               <a:rPr lang="en-US" dirty="0"/>
-              <a:t>Question 3: Which animal can help them to travel? Think for a moment, then raise your hand to answer.</a:t>
+              <a:t>Question 3: What animals do they have? Think for a moment, then raise your hand to answer.</a:t>
             </a:r>
             <a:endParaRPr lang="en-US" dirty="0"/>
           </a:p>
@@ -1169,7 +1172,7 @@
           <a:p>
             <a:r>
               <a:rPr lang="en-US" dirty="0"/>
-              <a:t>Good. The camel.</a:t>
+              <a:t>Good. Camels and goats.</a:t>
             </a:r>
             <a:endParaRPr lang="en-US" dirty="0"/>
           </a:p>
@@ -1433,7 +1436,7 @@
           <a:p>
             <a:r>
               <a:rPr lang="en-US" dirty="0"/>
-              <a:t>Activity 1. Look carefully at this picture: people take water from a well in the desert. Observe every detail before I ask the question.</a:t>
+              <a:t>Activity 1. Look carefully at this picture: a well in the desert. Observe every detail before I ask the question.</a:t>
             </a:r>
             <a:endParaRPr lang="en-US" dirty="0"/>
           </a:p>
@@ -1785,7 +1788,7 @@
           <a:p>
             <a:r>
               <a:rPr lang="en-US" dirty="0"/>
-              <a:t>Activity 2. Look carefully at this picture: sand moved by the wind. Observe every detail before I ask the question.</a:t>
+              <a:t>Activity 2. Look carefully at this picture: moving sand. Observe every detail before I ask the question.</a:t>
             </a:r>
             <a:endParaRPr lang="en-US" dirty="0"/>
           </a:p>
@@ -1873,7 +1876,7 @@
           <a:p>
             <a:r>
               <a:rPr lang="en-US" dirty="0"/>
-              <a:t>Here is the question for Activity 2: The wind moves this sand. What can it cover? Take one minute to think and write your answer in your rough notebook.</a:t>
+              <a:t>Here is the question for Activity 2: What can moving sand cover? Take one minute to think and write your answer in your rough notebook.</a:t>
             </a:r>
             <a:endParaRPr lang="en-US" dirty="0"/>
           </a:p>
@@ -2049,7 +2052,7 @@
           <a:p>
             <a:r>
               <a:rPr lang="en-US" dirty="0"/>
-              <a:t>Activity 3. Look carefully at this picture: a camel caravan in the Sahara. Observe every detail before I ask the question.</a:t>
+              <a:t>Activity 3. Look carefully at this picture: camels. Observe every detail before I ask the question.</a:t>
             </a:r>
             <a:endParaRPr lang="en-US" dirty="0"/>
           </a:p>
@@ -2225,7 +2228,7 @@
           <a:p>
             <a:r>
               <a:rPr lang="en-US" dirty="0"/>
-              <a:t>Let us check the answer together. It can walk for days without water and carry heavy loads on sand.</a:t>
+              <a:t>Let us check the answer together. It can walk for days without water and carry heavy loads.</a:t>
             </a:r>
             <a:endParaRPr lang="en-US" dirty="0"/>
           </a:p>
@@ -2313,7 +2316,7 @@
           <a:p>
             <a:r>
               <a:rPr lang="en-US" dirty="0"/>
-              <a:t>Activity 4. Look carefully at this picture: a Tuareg man with a long turban. Observe every detail before I ask the question.</a:t>
+              <a:t>Activity 4. Look carefully at this picture: tuareg people. Observe every detail before I ask the question.</a:t>
             </a:r>
             <a:endParaRPr lang="en-US" dirty="0"/>
           </a:p>
@@ -2577,7 +2580,7 @@
           <a:p>
             <a:r>
               <a:rPr lang="en-US" dirty="0"/>
-              <a:t>Let us check the answer together. They protect the body from the sun and the sand.</a:t>
+              <a:t>Let us check the answer together. To protect the body from the sun and the sand.</a:t>
             </a:r>
             <a:endParaRPr lang="en-US" dirty="0"/>
           </a:p>
@@ -2665,7 +2668,7 @@
           <a:p>
             <a:r>
               <a:rPr lang="en-US" dirty="0"/>
-              <a:t>Activity 5. Look carefully at this picture: a factory that makes fresh water from sea water. Observe every detail before I ask the question.</a:t>
+              <a:t>Activity 5. Look carefully at this picture: a water plant by the sea. Observe every detail before I ask the question.</a:t>
             </a:r>
             <a:endParaRPr lang="en-US" dirty="0"/>
           </a:p>
@@ -2753,7 +2756,7 @@
           <a:p>
             <a:r>
               <a:rPr lang="en-US" dirty="0"/>
-              <a:t>Here is the question for Activity 5: Rich desert countries have little fresh water. How do they get drinking water? Take one minute to think and write your answer in your rough notebook.</a:t>
+              <a:t>Here is the question for Activity 5: How do rich desert countries get drinking water from the sea? Take one minute to think and write your answer in your rough notebook.</a:t>
             </a:r>
             <a:endParaRPr lang="en-US" dirty="0"/>
           </a:p>
@@ -3017,7 +3020,7 @@
           <a:p>
             <a:r>
               <a:rPr lang="en-US" dirty="0"/>
-              <a:t>Let us copy the definitions. The key terms of this lesson are defined as follows. On this slide we have Nomad and Desalination. Write each point on a new line, with the key term first, and explain it in your own words when we revise.</a:t>
+              <a:t>Let us copy the definitions. The key terms of this lesson are defined as follows. On this slide we have Adaptation and Nomad. Write each point on a new line, with the key term first, and explain it in your own words when we revise.</a:t>
             </a:r>
             <a:endParaRPr lang="en-US" dirty="0"/>
           </a:p>
@@ -3105,7 +3108,7 @@
           <a:p>
             <a:r>
               <a:rPr lang="en-US" dirty="0"/>
-              <a:t>Let us copy Problems Faced. People in hot deserts face the following problems. On this slide we have Lack of water and Extreme temperatures. Write each point on a new line, with the key term first, and explain it in your own words when we revise. When you finish, we go to the next slide.</a:t>
+              <a:t>Let us copy Problems Faced. People in hot deserts face the following problems. Copy the point on Lack of water on the left, then draw the diagram on the right: a desert well. Give it a title and label it clearly.</a:t>
             </a:r>
             <a:endParaRPr lang="en-US" dirty="0"/>
           </a:p>
@@ -3193,7 +3196,7 @@
           <a:p>
             <a:r>
               <a:rPr lang="en-US" dirty="0"/>
-              <a:t>We continue with Problems Faced. On this slide we have Sandstorms and Poor soils. Write each point on a new line, with the key term first, and explain it in your own words when we revise.</a:t>
+              <a:t>We continue with Problems Faced. On this slide we have Extreme temperatures. Write each point on a new line, with the key term first, and explain it in your own words when we revise.</a:t>
             </a:r>
             <a:endParaRPr lang="en-US" dirty="0"/>
           </a:p>
@@ -3281,7 +3284,7 @@
           <a:p>
             <a:r>
               <a:rPr lang="en-US" dirty="0"/>
-              <a:t>Let us copy Adaptations. People adapt to hot deserts in the following ways. On this slide we have Nomadism and The camel. Write each point on a new line, with the key term first, and explain it in your own words when we revise. When you finish, we go to the next slide.</a:t>
+              <a:t>Copy the point on Sandstorms and moving sand on the left, then draw the diagram on the right: moving sand. Give it a title and label it clearly.</a:t>
             </a:r>
             <a:endParaRPr lang="en-US" dirty="0"/>
           </a:p>
@@ -3369,7 +3372,7 @@
           <a:p>
             <a:r>
               <a:rPr lang="en-US" dirty="0"/>
-              <a:t>We continue with Adaptations. On this slide we have Clothes and houses and Water supply. Write each point on a new line, with the key term first, and explain it in your own words when we revise.</a:t>
+              <a:t>We continue with Problems Faced. On this slide we have Poor soils and Isolation. Write each point on a new line, with the key term first, and explain it in your own words when we revise.</a:t>
             </a:r>
             <a:endParaRPr lang="en-US" dirty="0"/>
           </a:p>
@@ -3545,7 +3548,7 @@
           <a:p>
             <a:r>
               <a:rPr lang="en-US" dirty="0"/>
-              <a:t>Now let us check what you have understood. Question 1: Give two problems of desert people. Answer in your exercise book.</a:t>
+              <a:t>Let us copy Adaptations. People adapt in the following ways. Copy the point on Nomadism on the left, then draw the diagram on the right: camels. Give it a title and label it clearly.</a:t>
             </a:r>
             <a:endParaRPr lang="en-US" dirty="0"/>
           </a:p>
@@ -3633,7 +3636,7 @@
           <a:p>
             <a:r>
               <a:rPr lang="en-US" dirty="0"/>
-              <a:t>The expected answer is: lack of water and sandstorms. If you got it right, well done.</a:t>
+              <a:t>Copy the point on Clothes on the left, then draw the diagram on the right: tuareg people. Give it a title and label it clearly.</a:t>
             </a:r>
             <a:endParaRPr lang="en-US" dirty="0"/>
           </a:p>
@@ -3721,7 +3724,7 @@
           <a:p>
             <a:r>
               <a:rPr lang="en-US" dirty="0"/>
-              <a:t>Now let us check what you have understood. Question 2: Why is the camel useful in the desert? Answer in your exercise book.</a:t>
+              <a:t>We continue with Adaptations. On this slide we have Houses, Water and Irrigation. Write each point on a new line, with the key term first, and explain it in your own words when we revise.</a:t>
             </a:r>
             <a:endParaRPr lang="en-US" dirty="0"/>
           </a:p>
@@ -3809,7 +3812,7 @@
           <a:p>
             <a:r>
               <a:rPr lang="en-US" dirty="0"/>
-              <a:t>The expected answer is: it walks for days without water and carries heavy loads. If you got it right, well done.</a:t>
+              <a:t>Now let us check what you have understood. Question 1: Give two problems of desert people. Answer in your exercise book.</a:t>
             </a:r>
             <a:endParaRPr lang="en-US" dirty="0"/>
           </a:p>
@@ -3897,7 +3900,7 @@
           <a:p>
             <a:r>
               <a:rPr lang="en-US" dirty="0"/>
-              <a:t>For those who need more practice, fill in the blanks in your exercise book. The answers are: number 1, nomad; number 2, camel; number 3, desalination.</a:t>
+              <a:t>The expected answer is: lack of water and sandstorms. If you got it right, well done.</a:t>
             </a:r>
             <a:endParaRPr lang="en-US" dirty="0"/>
           </a:p>
@@ -3985,7 +3988,7 @@
           <a:p>
             <a:r>
               <a:rPr lang="en-US" dirty="0"/>
-              <a:t>For your homework: Find in your textbook or atlas the name of one oasis in the Sahara, and write the name of the country where it is found. We shall correct it at the beginning of our next lesson.</a:t>
+              <a:t>Now let us check what you have understood. Question 2: Why is the camel useful in the desert? Answer in your exercise book.</a:t>
             </a:r>
             <a:endParaRPr lang="en-US" dirty="0"/>
           </a:p>
@@ -4073,7 +4076,7 @@
           <a:p>
             <a:r>
               <a:rPr lang="en-US" dirty="0"/>
-              <a:t>Our next lesson will be on Lesson 3 (Part 5): The Desert Regions: Human Activities (Farming around Oases). Thank you for your attention, and see you next time.</a:t>
+              <a:t>The expected answer is: it walks for days without water and carries heavy loads. If you got it right, well done.</a:t>
             </a:r>
             <a:endParaRPr lang="en-US" dirty="0"/>
           </a:p>
@@ -4161,7 +4164,7 @@
           <a:p>
             <a:r>
               <a:rPr lang="en-US" dirty="0"/>
-              <a:t>Let us play the bilingual game. I say a word in English, and you give me the French word. Then we do the reverse.</a:t>
+              <a:t>For those who need more practice, fill in the blanks in your exercise book. The answers are: number 1, nomad; number 2, camel; number 3, desalination.</a:t>
             </a:r>
             <a:endParaRPr lang="en-US" dirty="0"/>
           </a:p>
@@ -4249,7 +4252,7 @@
           <a:p>
             <a:r>
               <a:rPr lang="en-US" dirty="0"/>
-              <a:t>I record this information in the official logbook of the class after the lesson.</a:t>
+              <a:t>For your homework: Find in your textbook or atlas the name of one oasis in the Sahara, and write the name of the country where it is found. We shall correct it at the beginning of our next lesson.</a:t>
             </a:r>
             <a:endParaRPr lang="en-US" dirty="0"/>
           </a:p>
@@ -4337,7 +4340,7 @@
           <a:p>
             <a:r>
               <a:rPr lang="en-US" dirty="0"/>
-              <a:t>I complete the second page of the logbook: the matter taught, the evaluation, the homework and the attendance.</a:t>
+              <a:t>Our next lesson will be on Lesson 3 (Part 5): The Desert Regions: Human Activities (Farming around Oases). Thank you for your attention, and see you next time.</a:t>
             </a:r>
             <a:endParaRPr lang="en-US" dirty="0"/>
           </a:p>
@@ -4513,7 +4516,7 @@
           <a:p>
             <a:r>
               <a:rPr lang="en-US" dirty="0"/>
-              <a:t>This slide is for me, the teacher: it gives the timing of the lesson and what to do if the projector is not available.</a:t>
+              <a:t>Let us play the bilingual game. I say a word in English, and you give me the French word. Then we do the reverse.</a:t>
             </a:r>
             <a:endParaRPr lang="en-US" dirty="0"/>
           </a:p>
@@ -4601,7 +4604,7 @@
           <a:p>
             <a:r>
               <a:rPr lang="en-US" dirty="0"/>
-              <a:t>Take your time to copy this part; we will continue together.</a:t>
+              <a:t>I record this information in the official logbook of the class after the lesson.</a:t>
             </a:r>
             <a:endParaRPr lang="en-US" dirty="0"/>
           </a:p>
@@ -4689,7 +4692,7 @@
           <a:p>
             <a:r>
               <a:rPr lang="en-US" dirty="0"/>
-              <a:t>These are the references and picture credits used to prepare this lesson.</a:t>
+              <a:t>I complete the second page of the logbook: the matter taught, the evaluation, the homework and the attendance.</a:t>
             </a:r>
             <a:endParaRPr lang="en-US" dirty="0"/>
           </a:p>
@@ -4713,6 +4716,270 @@
             <a:fld id="{F7021451-1387-4CA6-816F-3879F97B5CBC}" type="slidenum">
               <a:rPr lang="en-US"/>
               <a:t>52</a:t>
+            </a:fld>
+            <a:endParaRPr lang="en-US"/>
+          </a:p>
+        </p:txBody>
+      </p:sp>
+    </p:spTree>
+    <p:extLst>
+      <p:ext uri="{BB962C8B-B14F-4D97-AF65-F5344CB8AC3E}">
+        <p14:creationId xmlns:p14="http://schemas.microsoft.com/office/powerpoint/2010/main" val="1024086991"/>
+      </p:ext>
+    </p:extLst>
+  </p:cSld>
+  <p:clrMapOvr>
+    <a:masterClrMapping/>
+  </p:clrMapOvr>
+</p:notes>
+</file>
+
+<file path=ppt/notesSlides/notesSlide53.xml><?xml version="1.0" encoding="utf-8"?>
+<p:notes xmlns:a="http://schemas.openxmlformats.org/drawingml/2006/main" xmlns:r="http://schemas.openxmlformats.org/officeDocument/2006/relationships" xmlns:p="http://schemas.openxmlformats.org/presentationml/2006/main">
+  <p:cSld>
+    <p:spTree>
+      <p:nvGrpSpPr>
+        <p:cNvPr id="1" name=""/>
+        <p:cNvGrpSpPr/>
+        <p:nvPr/>
+      </p:nvGrpSpPr>
+      <p:grpSpPr>
+        <a:xfrm>
+          <a:off x="0" y="0"/>
+          <a:ext cx="0" cy="0"/>
+          <a:chOff x="0" y="0"/>
+          <a:chExt cx="0" cy="0"/>
+        </a:xfrm>
+      </p:grpSpPr>
+      <p:sp>
+        <p:nvSpPr>
+          <p:cNvPr id="2" name="Slide Image Placeholder 1"/>
+          <p:cNvSpPr>
+            <a:spLocks noGrp="1" noRot="1" noChangeAspect="1"/>
+          </p:cNvSpPr>
+          <p:nvPr>
+            <p:ph type="sldImg"/>
+          </p:nvPr>
+        </p:nvSpPr>
+        <p:spPr/>
+      </p:sp>
+      <p:sp>
+        <p:nvSpPr>
+          <p:cNvPr id="3" name="Notes Placeholder 2"/>
+          <p:cNvSpPr>
+            <a:spLocks noGrp="1"/>
+          </p:cNvSpPr>
+          <p:nvPr>
+            <p:ph type="body" idx="1"/>
+          </p:nvPr>
+        </p:nvSpPr>
+        <p:spPr/>
+        <p:txBody>
+          <a:bodyPr/>
+          <a:lstStyle/>
+          <a:p>
+            <a:r>
+              <a:rPr lang="en-US" dirty="0"/>
+              <a:t>This slide is for me, the teacher: it gives the timing of the lesson and what to do if the projector is not available.</a:t>
+            </a:r>
+            <a:endParaRPr lang="en-US" dirty="0"/>
+          </a:p>
+        </p:txBody>
+      </p:sp>
+      <p:sp>
+        <p:nvSpPr>
+          <p:cNvPr id="4" name="Slide Number Placeholder 3"/>
+          <p:cNvSpPr>
+            <a:spLocks noGrp="1"/>
+          </p:cNvSpPr>
+          <p:nvPr>
+            <p:ph type="sldNum" sz="quarter" idx="10"/>
+          </p:nvPr>
+        </p:nvSpPr>
+        <p:spPr/>
+        <p:txBody>
+          <a:bodyPr/>
+          <a:lstStyle/>
+          <a:p>
+            <a:fld id="{F7021451-1387-4CA6-816F-3879F97B5CBC}" type="slidenum">
+              <a:rPr lang="en-US"/>
+              <a:t>53</a:t>
+            </a:fld>
+            <a:endParaRPr lang="en-US"/>
+          </a:p>
+        </p:txBody>
+      </p:sp>
+    </p:spTree>
+    <p:extLst>
+      <p:ext uri="{BB962C8B-B14F-4D97-AF65-F5344CB8AC3E}">
+        <p14:creationId xmlns:p14="http://schemas.microsoft.com/office/powerpoint/2010/main" val="1024086991"/>
+      </p:ext>
+    </p:extLst>
+  </p:cSld>
+  <p:clrMapOvr>
+    <a:masterClrMapping/>
+  </p:clrMapOvr>
+</p:notes>
+</file>
+
+<file path=ppt/notesSlides/notesSlide54.xml><?xml version="1.0" encoding="utf-8"?>
+<p:notes xmlns:a="http://schemas.openxmlformats.org/drawingml/2006/main" xmlns:r="http://schemas.openxmlformats.org/officeDocument/2006/relationships" xmlns:p="http://schemas.openxmlformats.org/presentationml/2006/main">
+  <p:cSld>
+    <p:spTree>
+      <p:nvGrpSpPr>
+        <p:cNvPr id="1" name=""/>
+        <p:cNvGrpSpPr/>
+        <p:nvPr/>
+      </p:nvGrpSpPr>
+      <p:grpSpPr>
+        <a:xfrm>
+          <a:off x="0" y="0"/>
+          <a:ext cx="0" cy="0"/>
+          <a:chOff x="0" y="0"/>
+          <a:chExt cx="0" cy="0"/>
+        </a:xfrm>
+      </p:grpSpPr>
+      <p:sp>
+        <p:nvSpPr>
+          <p:cNvPr id="2" name="Slide Image Placeholder 1"/>
+          <p:cNvSpPr>
+            <a:spLocks noGrp="1" noRot="1" noChangeAspect="1"/>
+          </p:cNvSpPr>
+          <p:nvPr>
+            <p:ph type="sldImg"/>
+          </p:nvPr>
+        </p:nvSpPr>
+        <p:spPr/>
+      </p:sp>
+      <p:sp>
+        <p:nvSpPr>
+          <p:cNvPr id="3" name="Notes Placeholder 2"/>
+          <p:cNvSpPr>
+            <a:spLocks noGrp="1"/>
+          </p:cNvSpPr>
+          <p:nvPr>
+            <p:ph type="body" idx="1"/>
+          </p:nvPr>
+        </p:nvSpPr>
+        <p:spPr/>
+        <p:txBody>
+          <a:bodyPr/>
+          <a:lstStyle/>
+          <a:p>
+            <a:r>
+              <a:rPr lang="en-US" dirty="0"/>
+              <a:t>Take your time to copy this part; we will continue together.</a:t>
+            </a:r>
+            <a:endParaRPr lang="en-US" dirty="0"/>
+          </a:p>
+        </p:txBody>
+      </p:sp>
+      <p:sp>
+        <p:nvSpPr>
+          <p:cNvPr id="4" name="Slide Number Placeholder 3"/>
+          <p:cNvSpPr>
+            <a:spLocks noGrp="1"/>
+          </p:cNvSpPr>
+          <p:nvPr>
+            <p:ph type="sldNum" sz="quarter" idx="10"/>
+          </p:nvPr>
+        </p:nvSpPr>
+        <p:spPr/>
+        <p:txBody>
+          <a:bodyPr/>
+          <a:lstStyle/>
+          <a:p>
+            <a:fld id="{F7021451-1387-4CA6-816F-3879F97B5CBC}" type="slidenum">
+              <a:rPr lang="en-US"/>
+              <a:t>54</a:t>
+            </a:fld>
+            <a:endParaRPr lang="en-US"/>
+          </a:p>
+        </p:txBody>
+      </p:sp>
+    </p:spTree>
+    <p:extLst>
+      <p:ext uri="{BB962C8B-B14F-4D97-AF65-F5344CB8AC3E}">
+        <p14:creationId xmlns:p14="http://schemas.microsoft.com/office/powerpoint/2010/main" val="1024086991"/>
+      </p:ext>
+    </p:extLst>
+  </p:cSld>
+  <p:clrMapOvr>
+    <a:masterClrMapping/>
+  </p:clrMapOvr>
+</p:notes>
+</file>
+
+<file path=ppt/notesSlides/notesSlide55.xml><?xml version="1.0" encoding="utf-8"?>
+<p:notes xmlns:a="http://schemas.openxmlformats.org/drawingml/2006/main" xmlns:r="http://schemas.openxmlformats.org/officeDocument/2006/relationships" xmlns:p="http://schemas.openxmlformats.org/presentationml/2006/main">
+  <p:cSld>
+    <p:spTree>
+      <p:nvGrpSpPr>
+        <p:cNvPr id="1" name=""/>
+        <p:cNvGrpSpPr/>
+        <p:nvPr/>
+      </p:nvGrpSpPr>
+      <p:grpSpPr>
+        <a:xfrm>
+          <a:off x="0" y="0"/>
+          <a:ext cx="0" cy="0"/>
+          <a:chOff x="0" y="0"/>
+          <a:chExt cx="0" cy="0"/>
+        </a:xfrm>
+      </p:grpSpPr>
+      <p:sp>
+        <p:nvSpPr>
+          <p:cNvPr id="2" name="Slide Image Placeholder 1"/>
+          <p:cNvSpPr>
+            <a:spLocks noGrp="1" noRot="1" noChangeAspect="1"/>
+          </p:cNvSpPr>
+          <p:nvPr>
+            <p:ph type="sldImg"/>
+          </p:nvPr>
+        </p:nvSpPr>
+        <p:spPr/>
+      </p:sp>
+      <p:sp>
+        <p:nvSpPr>
+          <p:cNvPr id="3" name="Notes Placeholder 2"/>
+          <p:cNvSpPr>
+            <a:spLocks noGrp="1"/>
+          </p:cNvSpPr>
+          <p:nvPr>
+            <p:ph type="body" idx="1"/>
+          </p:nvPr>
+        </p:nvSpPr>
+        <p:spPr/>
+        <p:txBody>
+          <a:bodyPr/>
+          <a:lstStyle/>
+          <a:p>
+            <a:r>
+              <a:rPr lang="en-US" dirty="0"/>
+              <a:t>These are the references and picture credits used to prepare this lesson.</a:t>
+            </a:r>
+            <a:endParaRPr lang="en-US" dirty="0"/>
+          </a:p>
+        </p:txBody>
+      </p:sp>
+      <p:sp>
+        <p:nvSpPr>
+          <p:cNvPr id="4" name="Slide Number Placeholder 3"/>
+          <p:cNvSpPr>
+            <a:spLocks noGrp="1"/>
+          </p:cNvSpPr>
+          <p:nvPr>
+            <p:ph type="sldNum" sz="quarter" idx="10"/>
+          </p:nvPr>
+        </p:nvSpPr>
+        <p:spPr/>
+        <p:txBody>
+          <a:bodyPr/>
+          <a:lstStyle/>
+          <a:p>
+            <a:fld id="{F7021451-1387-4CA6-816F-3879F97B5CBC}" type="slidenum">
+              <a:rPr lang="en-US"/>
+              <a:t>55</a:t>
             </a:fld>
             <a:endParaRPr lang="en-US"/>
           </a:p>
@@ -6505,7 +6772,7 @@
                 <a:ea typeface="Times New Roman" pitchFamily="34" charset="-122"/>
                 <a:cs typeface="Times New Roman" pitchFamily="34" charset="-120"/>
               </a:rPr>
-              <a:t>A Tuareg family lives in the Sahara, in Niger. Their well is dry, and there is no grass for their camels and goats. The father must decide what to do.</a:t>
+              <a:t>A Tuareg family lives in the Sahara, in Niger. Their well is dry, and there is no grass for their camels and goats. The father asks: "How can my family survive in this hard place?"</a:t>
             </a:r>
             <a:endParaRPr lang="en-US" sz="4000" dirty="0"/>
           </a:p>
@@ -6943,7 +7210,7 @@
                 <a:ea typeface="Times New Roman" pitchFamily="34" charset="-122"/>
                 <a:cs typeface="Times New Roman" pitchFamily="34" charset="-120"/>
               </a:rPr>
-              <a:t>The family has no water and no grass for the animals.</a:t>
+              <a:t>The family lacks water and grass and must adapt to survive.</a:t>
             </a:r>
             <a:endParaRPr lang="en-US" sz="4000" dirty="0"/>
           </a:p>
@@ -7162,7 +7429,7 @@
                 <a:ea typeface="Times New Roman" pitchFamily="34" charset="-122"/>
                 <a:cs typeface="Times New Roman" pitchFamily="34" charset="-120"/>
               </a:rPr>
-              <a:t>What can the father do?</a:t>
+              <a:t>Where does the family live?</a:t>
             </a:r>
             <a:endParaRPr lang="en-US" sz="4000" dirty="0"/>
           </a:p>
@@ -7381,7 +7648,7 @@
                 <a:ea typeface="Times New Roman" pitchFamily="34" charset="-122"/>
                 <a:cs typeface="Times New Roman" pitchFamily="34" charset="-120"/>
               </a:rPr>
-              <a:t>He can move with his animals to another well.</a:t>
+              <a:t>In the Sahara, in Niger.</a:t>
             </a:r>
             <a:endParaRPr lang="en-US" sz="4000" dirty="0"/>
           </a:p>
@@ -7600,7 +7867,7 @@
                 <a:ea typeface="Times New Roman" pitchFamily="34" charset="-122"/>
                 <a:cs typeface="Times New Roman" pitchFamily="34" charset="-120"/>
               </a:rPr>
-              <a:t>Which animal can help them to travel?</a:t>
+              <a:t>What animals do they have?</a:t>
             </a:r>
             <a:endParaRPr lang="en-US" sz="4000" dirty="0"/>
           </a:p>
@@ -7819,7 +8086,7 @@
                 <a:ea typeface="Times New Roman" pitchFamily="34" charset="-122"/>
                 <a:cs typeface="Times New Roman" pitchFamily="34" charset="-120"/>
               </a:rPr>
-              <a:t>The camel.</a:t>
+              <a:t>Camels and goats.</a:t>
             </a:r>
             <a:endParaRPr lang="en-US" sz="4000" dirty="0"/>
           </a:p>
@@ -8471,7 +8738,7 @@
                 <a:ea typeface="Times New Roman" pitchFamily="34" charset="-122"/>
                 <a:cs typeface="Times New Roman" pitchFamily="34" charset="-120"/>
               </a:rPr>
-              <a:t>People take water from a well in the desert.</a:t>
+              <a:t>A well in the desert.</a:t>
             </a:r>
             <a:endParaRPr lang="en-US" sz="1800" dirty="0"/>
           </a:p>
@@ -9718,7 +9985,7 @@
                 <a:ea typeface="Times New Roman" pitchFamily="34" charset="-122"/>
                 <a:cs typeface="Times New Roman" pitchFamily="34" charset="-120"/>
               </a:rPr>
-              <a:t>Sand moved by the wind.</a:t>
+              <a:t>Moving sand.</a:t>
             </a:r>
             <a:endParaRPr lang="en-US" sz="1800" dirty="0"/>
           </a:p>
@@ -9937,7 +10204,7 @@
                 <a:ea typeface="Times New Roman" pitchFamily="34" charset="-122"/>
                 <a:cs typeface="Times New Roman" pitchFamily="34" charset="-120"/>
               </a:rPr>
-              <a:t>The wind moves this sand. What can it cover?</a:t>
+              <a:t>What can moving sand cover?</a:t>
             </a:r>
             <a:endParaRPr lang="en-US" sz="4000" dirty="0"/>
           </a:p>
@@ -10370,7 +10637,7 @@
                 <a:ea typeface="Times New Roman" pitchFamily="34" charset="-122"/>
                 <a:cs typeface="Times New Roman" pitchFamily="34" charset="-120"/>
               </a:rPr>
-              <a:t>A camel caravan in the Sahara.</a:t>
+              <a:t>Camels.</a:t>
             </a:r>
             <a:endParaRPr lang="en-US" sz="1800" dirty="0"/>
           </a:p>
@@ -10808,7 +11075,7 @@
                 <a:ea typeface="Times New Roman" pitchFamily="34" charset="-122"/>
                 <a:cs typeface="Times New Roman" pitchFamily="34" charset="-120"/>
               </a:rPr>
-              <a:t>It can walk for days without water and carry heavy loads on sand.</a:t>
+              <a:t>It can walk for days without water and carry heavy loads.</a:t>
             </a:r>
             <a:endParaRPr lang="en-US" sz="4000" dirty="0"/>
           </a:p>
@@ -11022,7 +11289,7 @@
                 <a:ea typeface="Times New Roman" pitchFamily="34" charset="-122"/>
                 <a:cs typeface="Times New Roman" pitchFamily="34" charset="-120"/>
               </a:rPr>
-              <a:t>A Tuareg man with a long turban.</a:t>
+              <a:t>Tuareg people.</a:t>
             </a:r>
             <a:endParaRPr lang="en-US" sz="1800" dirty="0"/>
           </a:p>
@@ -12469,7 +12736,7 @@
                 <a:ea typeface="Times New Roman" pitchFamily="34" charset="-122"/>
                 <a:cs typeface="Times New Roman" pitchFamily="34" charset="-120"/>
               </a:rPr>
-              <a:t>They protect the body from the sun and the sand.</a:t>
+              <a:t>To protect the body from the sun and the sand.</a:t>
             </a:r>
             <a:endParaRPr lang="en-US" sz="4000" dirty="0"/>
           </a:p>
@@ -12683,7 +12950,7 @@
                 <a:ea typeface="Times New Roman" pitchFamily="34" charset="-122"/>
                 <a:cs typeface="Times New Roman" pitchFamily="34" charset="-120"/>
               </a:rPr>
-              <a:t>A factory that makes fresh water from sea water.</a:t>
+              <a:t>A water plant by the sea.</a:t>
             </a:r>
             <a:endParaRPr lang="en-US" sz="1800" dirty="0"/>
           </a:p>
@@ -12902,7 +13169,7 @@
                 <a:ea typeface="Times New Roman" pitchFamily="34" charset="-122"/>
                 <a:cs typeface="Times New Roman" pitchFamily="34" charset="-120"/>
               </a:rPr>
-              <a:t>Rich desert countries have little fresh water. How do they get drinking water?</a:t>
+              <a:t>How do rich desert countries get drinking water from the sea?</a:t>
             </a:r>
             <a:endParaRPr lang="en-US" sz="4000" dirty="0"/>
           </a:p>
@@ -13515,7 +13782,7 @@
         <p:spPr>
           <a:xfrm>
             <a:off x="0" y="658368"/>
-            <a:ext cx="3840480" cy="5833872"/>
+            <a:ext cx="2468880" cy="5833872"/>
           </a:xfrm>
           <a:prstGeom prst="rect">
             <a:avLst/>
@@ -13530,8 +13797,8 @@
         </p:nvSpPr>
         <p:spPr>
           <a:xfrm>
-            <a:off x="4069080" y="1005840"/>
-            <a:ext cx="7802575" cy="731520"/>
+            <a:off x="2697480" y="1005840"/>
+            <a:ext cx="9174175" cy="731520"/>
           </a:xfrm>
           <a:prstGeom prst="rect">
             <a:avLst/>
@@ -13571,8 +13838,8 @@
         </p:nvSpPr>
         <p:spPr>
           <a:xfrm>
-            <a:off x="4069080" y="1783080"/>
-            <a:ext cx="7802575" cy="4663440"/>
+            <a:off x="2697480" y="1783080"/>
+            <a:ext cx="9174175" cy="4663440"/>
           </a:xfrm>
           <a:prstGeom prst="rect">
             <a:avLst/>
@@ -13604,11 +13871,51 @@
             <a:endParaRPr lang="en-US" sz="4000" dirty="0"/>
           </a:p>
           <a:p>
-            <a:pPr algn="l" indent="0" marL="0">
+            <a:pPr algn="l" marL="342900" indent="-342900">
               <a:spcAft>
                 <a:spcPts val="800"/>
               </a:spcAft>
-              <a:buNone/>
+              <a:buSzPct val="100000"/>
+              <a:buChar char="•"/>
+            </a:pPr>
+            <a:r>
+              <a:rPr lang="en-US" sz="4000" b="1" dirty="0">
+                <a:solidFill>
+                  <a:srgbClr val="111111"/>
+                </a:solidFill>
+                <a:latin typeface="Times New Roman" pitchFamily="34" charset="0"/>
+                <a:ea typeface="Times New Roman" pitchFamily="34" charset="-122"/>
+                <a:cs typeface="Times New Roman" pitchFamily="34" charset="-120"/>
+              </a:rPr>
+              <a:t>Adaptation: </a:t>
+            </a:r>
+            <a:pPr algn="l" marL="342900" indent="-342900">
+              <a:spcAft>
+                <a:spcPts val="800"/>
+              </a:spcAft>
+              <a:buSzPct val="100000"/>
+              <a:buChar char="•"/>
+            </a:pPr>
+            <a:r>
+              <a:rPr lang="en-US" sz="4000" dirty="0">
+                <a:solidFill>
+                  <a:srgbClr val="111111"/>
+                </a:solidFill>
+                <a:latin typeface="Times New Roman" pitchFamily="34" charset="0"/>
+                <a:ea typeface="Times New Roman" pitchFamily="34" charset="-122"/>
+                <a:cs typeface="Times New Roman" pitchFamily="34" charset="-120"/>
+              </a:rPr>
+              <a:t>It is the way people change their way of life to live in an environment.</a:t>
+            </a:r>
+            <a:endParaRPr lang="en-US" sz="4000" dirty="0"/>
+          </a:p>
+          <a:p>
+            <a:pPr algn="l" marL="342900" indent="-342900">
+              <a:spcAft>
+                <a:spcPts val="800"/>
+              </a:spcAft>
+              <a:buSzPct val="100000"/>
+              <a:buChar char="•"/>
             </a:pPr>
             <a:r>
               <a:rPr lang="en-US" sz="4000" b="1" dirty="0">
@@ -13621,11 +13928,12 @@
               </a:rPr>
               <a:t>Nomad: </a:t>
             </a:r>
-            <a:pPr algn="l" indent="0" marL="0">
+            <a:pPr algn="l" marL="342900" indent="-342900">
               <a:spcAft>
                 <a:spcPts val="800"/>
               </a:spcAft>
-              <a:buNone/>
+              <a:buSzPct val="100000"/>
+              <a:buChar char="•"/>
             </a:pPr>
             <a:r>
               <a:rPr lang="en-US" sz="4000" dirty="0">
@@ -13636,44 +13944,7 @@
                 <a:ea typeface="Times New Roman" pitchFamily="34" charset="-122"/>
                 <a:cs typeface="Times New Roman" pitchFamily="34" charset="-120"/>
               </a:rPr>
-              <a:t>It is a person who moves from place to place with animals.</a:t>
-            </a:r>
-            <a:endParaRPr lang="en-US" sz="4000" dirty="0"/>
-          </a:p>
-          <a:p>
-            <a:pPr algn="l" indent="0" marL="0">
-              <a:spcAft>
-                <a:spcPts val="800"/>
-              </a:spcAft>
-              <a:buNone/>
-            </a:pPr>
-            <a:r>
-              <a:rPr lang="en-US" sz="4000" b="1" dirty="0">
-                <a:solidFill>
-                  <a:srgbClr val="111111"/>
-                </a:solidFill>
-                <a:latin typeface="Times New Roman" pitchFamily="34" charset="0"/>
-                <a:ea typeface="Times New Roman" pitchFamily="34" charset="-122"/>
-                <a:cs typeface="Times New Roman" pitchFamily="34" charset="-120"/>
-              </a:rPr>
-              <a:t>Desalination: </a:t>
-            </a:r>
-            <a:pPr algn="l" indent="0" marL="0">
-              <a:spcAft>
-                <a:spcPts val="800"/>
-              </a:spcAft>
-              <a:buNone/>
-            </a:pPr>
-            <a:r>
-              <a:rPr lang="en-US" sz="4000" dirty="0">
-                <a:solidFill>
-                  <a:srgbClr val="111111"/>
-                </a:solidFill>
-                <a:latin typeface="Times New Roman" pitchFamily="34" charset="0"/>
-                <a:ea typeface="Times New Roman" pitchFamily="34" charset="-122"/>
-                <a:cs typeface="Times New Roman" pitchFamily="34" charset="-120"/>
-              </a:rPr>
-              <a:t>It is the removal of salt from sea water to make it drinkable.</a:t>
+              <a:t>It is a person who moves from place to place with his animals.</a:t>
             </a:r>
             <a:endParaRPr lang="en-US" sz="4000" dirty="0"/>
           </a:p>
@@ -13791,9 +14062,131 @@
           </a:p>
         </p:txBody>
       </p:sp>
+      <p:sp>
+        <p:nvSpPr>
+          <p:cNvPr id="3" name="Text 1"/>
+          <p:cNvSpPr/>
+          <p:nvPr/>
+        </p:nvSpPr>
+        <p:spPr>
+          <a:xfrm>
+            <a:off x="365760" y="1005840"/>
+            <a:ext cx="11460175" cy="731520"/>
+          </a:xfrm>
+          <a:prstGeom prst="rect">
+            <a:avLst/>
+          </a:prstGeom>
+          <a:noFill/>
+          <a:ln/>
+        </p:spPr>
+        <p:txBody>
+          <a:bodyPr wrap="square" lIns="0" tIns="0" rIns="0" bIns="0" rtlCol="0" anchor="ctr">
+            <a:normAutofit/>
+          </a:bodyPr>
+          <a:lstStyle/>
+          <a:p>
+            <a:pPr algn="ctr" indent="0" marL="0">
+              <a:buNone/>
+            </a:pPr>
+            <a:r>
+              <a:rPr lang="en-US" sz="3600" b="1" dirty="0">
+                <a:solidFill>
+                  <a:srgbClr val="990011"/>
+                </a:solidFill>
+                <a:latin typeface="Times New Roman" pitchFamily="34" charset="0"/>
+                <a:ea typeface="Times New Roman" pitchFamily="34" charset="-122"/>
+                <a:cs typeface="Times New Roman" pitchFamily="34" charset="-120"/>
+              </a:rPr>
+              <a:t>1. Problems Faced</a:t>
+            </a:r>
+            <a:endParaRPr lang="en-US" sz="3600" dirty="0"/>
+          </a:p>
+        </p:txBody>
+      </p:sp>
+      <p:sp>
+        <p:nvSpPr>
+          <p:cNvPr id="4" name="Text 2"/>
+          <p:cNvSpPr/>
+          <p:nvPr/>
+        </p:nvSpPr>
+        <p:spPr>
+          <a:xfrm>
+            <a:off x="365760" y="1783080"/>
+            <a:ext cx="4846320" cy="4617720"/>
+          </a:xfrm>
+          <a:prstGeom prst="rect">
+            <a:avLst/>
+          </a:prstGeom>
+          <a:noFill/>
+          <a:ln/>
+        </p:spPr>
+        <p:txBody>
+          <a:bodyPr wrap="square" lIns="0" tIns="0" rIns="0" bIns="0" rtlCol="0" anchor="t"/>
+          <a:lstStyle/>
+          <a:p>
+            <a:pPr algn="l" indent="0" marL="0">
+              <a:spcAft>
+                <a:spcPts val="800"/>
+              </a:spcAft>
+              <a:buNone/>
+            </a:pPr>
+            <a:r>
+              <a:rPr lang="en-US" sz="3600" i="1" dirty="0">
+                <a:solidFill>
+                  <a:srgbClr val="111111"/>
+                </a:solidFill>
+                <a:latin typeface="Times New Roman" pitchFamily="34" charset="0"/>
+                <a:ea typeface="Times New Roman" pitchFamily="34" charset="-122"/>
+                <a:cs typeface="Times New Roman" pitchFamily="34" charset="-120"/>
+              </a:rPr>
+              <a:t>People in hot deserts face the following problems:</a:t>
+            </a:r>
+            <a:endParaRPr lang="en-US" sz="3600" dirty="0"/>
+          </a:p>
+          <a:p>
+            <a:pPr algn="l" marL="342900" indent="-342900">
+              <a:spcAft>
+                <a:spcPts val="800"/>
+              </a:spcAft>
+              <a:buSzPct val="100000"/>
+              <a:buChar char="•"/>
+            </a:pPr>
+            <a:r>
+              <a:rPr lang="en-US" sz="3600" b="1" dirty="0">
+                <a:solidFill>
+                  <a:srgbClr val="111111"/>
+                </a:solidFill>
+                <a:latin typeface="Times New Roman" pitchFamily="34" charset="0"/>
+                <a:ea typeface="Times New Roman" pitchFamily="34" charset="-122"/>
+                <a:cs typeface="Times New Roman" pitchFamily="34" charset="-120"/>
+              </a:rPr>
+              <a:t>Lack of water: </a:t>
+            </a:r>
+            <a:pPr algn="l" marL="342900" indent="-342900">
+              <a:spcAft>
+                <a:spcPts val="800"/>
+              </a:spcAft>
+              <a:buSzPct val="100000"/>
+              <a:buChar char="•"/>
+            </a:pPr>
+            <a:r>
+              <a:rPr lang="en-US" sz="3600" dirty="0">
+                <a:solidFill>
+                  <a:srgbClr val="111111"/>
+                </a:solidFill>
+                <a:latin typeface="Times New Roman" pitchFamily="34" charset="0"/>
+                <a:ea typeface="Times New Roman" pitchFamily="34" charset="-122"/>
+                <a:cs typeface="Times New Roman" pitchFamily="34" charset="-120"/>
+              </a:rPr>
+              <a:t>Wells and rivers are few.</a:t>
+            </a:r>
+            <a:endParaRPr lang="en-US" sz="3600" dirty="0"/>
+          </a:p>
+        </p:txBody>
+      </p:sp>
       <p:pic>
         <p:nvPicPr>
-          <p:cNvPr id="3" name="Image 0" descr="/home/claude/f4/img/minesec_sheet.png">    </p:cNvPr>
+          <p:cNvPr id="5" name="Image 0" descr="/home/claude/f4/img/v2/f2t_desert_well.jpg">    </p:cNvPr>
           <p:cNvPicPr>
             <a:picLocks noChangeAspect="1"/>
           </p:cNvPicPr>
@@ -13807,8 +14200,8 @@
         </p:blipFill>
         <p:spPr>
           <a:xfrm>
-            <a:off x="0" y="658368"/>
-            <a:ext cx="3840480" cy="5833872"/>
+            <a:off x="5349240" y="2071212"/>
+            <a:ext cx="6659575" cy="3693983"/>
           </a:xfrm>
           <a:prstGeom prst="rect">
             <a:avLst/>
@@ -13817,14 +14210,14 @@
       </p:pic>
       <p:sp>
         <p:nvSpPr>
-          <p:cNvPr id="4" name="Text 1"/>
+          <p:cNvPr id="6" name="Text 3"/>
           <p:cNvSpPr/>
           <p:nvPr/>
         </p:nvSpPr>
         <p:spPr>
           <a:xfrm>
-            <a:off x="4069080" y="1005840"/>
-            <a:ext cx="7802575" cy="731520"/>
+            <a:off x="5349240" y="6089904"/>
+            <a:ext cx="6659575" cy="347472"/>
           </a:xfrm>
           <a:prstGeom prst="rect">
             <a:avLst/>
@@ -13833,142 +14226,24 @@
           <a:ln/>
         </p:spPr>
         <p:txBody>
-          <a:bodyPr wrap="square" lIns="0" tIns="0" rIns="0" bIns="0" rtlCol="0" anchor="ctr">
-            <a:normAutofit/>
-          </a:bodyPr>
+          <a:bodyPr wrap="square" lIns="0" tIns="0" rIns="0" bIns="0" rtlCol="0" anchor="ctr"/>
           <a:lstStyle/>
           <a:p>
             <a:pPr algn="ctr" indent="0" marL="0">
               <a:buNone/>
             </a:pPr>
             <a:r>
-              <a:rPr lang="en-US" sz="3600" b="1" dirty="0">
-                <a:solidFill>
-                  <a:srgbClr val="990011"/>
+              <a:rPr lang="en-US" sz="1600" i="1" dirty="0">
+                <a:solidFill>
+                  <a:srgbClr val="555555"/>
                 </a:solidFill>
                 <a:latin typeface="Times New Roman" pitchFamily="34" charset="0"/>
                 <a:ea typeface="Times New Roman" pitchFamily="34" charset="-122"/>
                 <a:cs typeface="Times New Roman" pitchFamily="34" charset="-120"/>
               </a:rPr>
-              <a:t>1. Problems Faced</a:t>
-            </a:r>
-            <a:endParaRPr lang="en-US" sz="3600" dirty="0"/>
-          </a:p>
-        </p:txBody>
-      </p:sp>
-      <p:sp>
-        <p:nvSpPr>
-          <p:cNvPr id="5" name="Text 2"/>
-          <p:cNvSpPr/>
-          <p:nvPr/>
-        </p:nvSpPr>
-        <p:spPr>
-          <a:xfrm>
-            <a:off x="4069080" y="1783080"/>
-            <a:ext cx="7802575" cy="4663440"/>
-          </a:xfrm>
-          <a:prstGeom prst="rect">
-            <a:avLst/>
-          </a:prstGeom>
-          <a:noFill/>
-          <a:ln/>
-        </p:spPr>
-        <p:txBody>
-          <a:bodyPr wrap="square" lIns="0" tIns="0" rIns="0" bIns="0" rtlCol="0" anchor="t"/>
-          <a:lstStyle/>
-          <a:p>
-            <a:pPr algn="l" indent="0" marL="0">
-              <a:spcAft>
-                <a:spcPts val="800"/>
-              </a:spcAft>
-              <a:buNone/>
-            </a:pPr>
-            <a:r>
-              <a:rPr lang="en-US" sz="4000" i="1" dirty="0">
-                <a:solidFill>
-                  <a:srgbClr val="111111"/>
-                </a:solidFill>
-                <a:latin typeface="Times New Roman" pitchFamily="34" charset="0"/>
-                <a:ea typeface="Times New Roman" pitchFamily="34" charset="-122"/>
-                <a:cs typeface="Times New Roman" pitchFamily="34" charset="-120"/>
-              </a:rPr>
-              <a:t>People in hot deserts face the following problems:</a:t>
-            </a:r>
-            <a:endParaRPr lang="en-US" sz="4000" dirty="0"/>
-          </a:p>
-          <a:p>
-            <a:pPr algn="l" indent="0" marL="0">
-              <a:spcAft>
-                <a:spcPts val="800"/>
-              </a:spcAft>
-              <a:buNone/>
-            </a:pPr>
-            <a:r>
-              <a:rPr lang="en-US" sz="4000" b="1" dirty="0">
-                <a:solidFill>
-                  <a:srgbClr val="111111"/>
-                </a:solidFill>
-                <a:latin typeface="Times New Roman" pitchFamily="34" charset="0"/>
-                <a:ea typeface="Times New Roman" pitchFamily="34" charset="-122"/>
-                <a:cs typeface="Times New Roman" pitchFamily="34" charset="-120"/>
-              </a:rPr>
-              <a:t>Lack of water: </a:t>
-            </a:r>
-            <a:pPr algn="l" indent="0" marL="0">
-              <a:spcAft>
-                <a:spcPts val="800"/>
-              </a:spcAft>
-              <a:buNone/>
-            </a:pPr>
-            <a:r>
-              <a:rPr lang="en-US" sz="4000" dirty="0">
-                <a:solidFill>
-                  <a:srgbClr val="111111"/>
-                </a:solidFill>
-                <a:latin typeface="Times New Roman" pitchFamily="34" charset="0"/>
-                <a:ea typeface="Times New Roman" pitchFamily="34" charset="-122"/>
-                <a:cs typeface="Times New Roman" pitchFamily="34" charset="-120"/>
-              </a:rPr>
-              <a:t>Wells dry up and there is little water for people and animals.</a:t>
-            </a:r>
-            <a:endParaRPr lang="en-US" sz="4000" dirty="0"/>
-          </a:p>
-          <a:p>
-            <a:pPr algn="l" indent="0" marL="0">
-              <a:spcAft>
-                <a:spcPts val="800"/>
-              </a:spcAft>
-              <a:buNone/>
-            </a:pPr>
-            <a:r>
-              <a:rPr lang="en-US" sz="4000" b="1" dirty="0">
-                <a:solidFill>
-                  <a:srgbClr val="111111"/>
-                </a:solidFill>
-                <a:latin typeface="Times New Roman" pitchFamily="34" charset="0"/>
-                <a:ea typeface="Times New Roman" pitchFamily="34" charset="-122"/>
-                <a:cs typeface="Times New Roman" pitchFamily="34" charset="-120"/>
-              </a:rPr>
-              <a:t>Extreme temperatures: </a:t>
-            </a:r>
-            <a:pPr algn="l" indent="0" marL="0">
-              <a:spcAft>
-                <a:spcPts val="800"/>
-              </a:spcAft>
-              <a:buNone/>
-            </a:pPr>
-            <a:r>
-              <a:rPr lang="en-US" sz="4000" dirty="0">
-                <a:solidFill>
-                  <a:srgbClr val="111111"/>
-                </a:solidFill>
-                <a:latin typeface="Times New Roman" pitchFamily="34" charset="0"/>
-                <a:ea typeface="Times New Roman" pitchFamily="34" charset="-122"/>
-                <a:cs typeface="Times New Roman" pitchFamily="34" charset="-120"/>
-              </a:rPr>
-              <a:t>Days are very hot and nights are cold.</a:t>
-            </a:r>
-            <a:endParaRPr lang="en-US" sz="4000" dirty="0"/>
+              <a:t>Illustration: a desert well</a:t>
+            </a:r>
+            <a:endParaRPr lang="en-US" sz="1600" dirty="0"/>
           </a:p>
         </p:txBody>
       </p:sp>
@@ -14143,7 +14418,7 @@
                 <a:ea typeface="Times New Roman" pitchFamily="34" charset="-122"/>
                 <a:cs typeface="Times New Roman" pitchFamily="34" charset="-120"/>
               </a:rPr>
-              <a:t>1. Problems Faced (continued)</a:t>
+              <a:t>1. Problems Faced</a:t>
             </a:r>
             <a:endParaRPr lang="en-US" sz="3600" dirty="0"/>
           </a:p>
@@ -14170,11 +14445,12 @@
           <a:bodyPr wrap="square" lIns="0" tIns="0" rIns="0" bIns="0" rtlCol="0" anchor="t"/>
           <a:lstStyle/>
           <a:p>
-            <a:pPr algn="l" indent="0" marL="0">
+            <a:pPr algn="l" marL="342900" indent="-342900">
               <a:spcAft>
                 <a:spcPts val="800"/>
               </a:spcAft>
-              <a:buNone/>
+              <a:buSzPct val="100000"/>
+              <a:buChar char="•"/>
             </a:pPr>
             <a:r>
               <a:rPr lang="en-US" sz="4000" b="1" dirty="0">
@@ -14185,13 +14461,14 @@
                 <a:ea typeface="Times New Roman" pitchFamily="34" charset="-122"/>
                 <a:cs typeface="Times New Roman" pitchFamily="34" charset="-120"/>
               </a:rPr>
-              <a:t>Sandstorms: </a:t>
-            </a:r>
-            <a:pPr algn="l" indent="0" marL="0">
+              <a:t>Extreme temperatures: </a:t>
+            </a:r>
+            <a:pPr algn="l" marL="342900" indent="-342900">
               <a:spcAft>
                 <a:spcPts val="800"/>
               </a:spcAft>
-              <a:buNone/>
+              <a:buSzPct val="100000"/>
+              <a:buChar char="•"/>
             </a:pPr>
             <a:r>
               <a:rPr lang="en-US" sz="4000" dirty="0">
@@ -14202,44 +14479,7 @@
                 <a:ea typeface="Times New Roman" pitchFamily="34" charset="-122"/>
                 <a:cs typeface="Times New Roman" pitchFamily="34" charset="-120"/>
               </a:rPr>
-              <a:t>Sandstorms hurt the eyes and cover roads and fields.</a:t>
-            </a:r>
-            <a:endParaRPr lang="en-US" sz="4000" dirty="0"/>
-          </a:p>
-          <a:p>
-            <a:pPr algn="l" indent="0" marL="0">
-              <a:spcAft>
-                <a:spcPts val="800"/>
-              </a:spcAft>
-              <a:buNone/>
-            </a:pPr>
-            <a:r>
-              <a:rPr lang="en-US" sz="4000" b="1" dirty="0">
-                <a:solidFill>
-                  <a:srgbClr val="111111"/>
-                </a:solidFill>
-                <a:latin typeface="Times New Roman" pitchFamily="34" charset="0"/>
-                <a:ea typeface="Times New Roman" pitchFamily="34" charset="-122"/>
-                <a:cs typeface="Times New Roman" pitchFamily="34" charset="-120"/>
-              </a:rPr>
-              <a:t>Poor soils: </a:t>
-            </a:r>
-            <a:pPr algn="l" indent="0" marL="0">
-              <a:spcAft>
-                <a:spcPts val="800"/>
-              </a:spcAft>
-              <a:buNone/>
-            </a:pPr>
-            <a:r>
-              <a:rPr lang="en-US" sz="4000" dirty="0">
-                <a:solidFill>
-                  <a:srgbClr val="111111"/>
-                </a:solidFill>
-                <a:latin typeface="Times New Roman" pitchFamily="34" charset="0"/>
-                <a:ea typeface="Times New Roman" pitchFamily="34" charset="-122"/>
-                <a:cs typeface="Times New Roman" pitchFamily="34" charset="-120"/>
-              </a:rPr>
-              <a:t>Sandy and salty soils make farming difficult.</a:t>
+              <a:t>Very hot days and cold nights.</a:t>
             </a:r>
             <a:endParaRPr lang="en-US" sz="4000" dirty="0"/>
           </a:p>
@@ -14357,9 +14597,111 @@
           </a:p>
         </p:txBody>
       </p:sp>
+      <p:sp>
+        <p:nvSpPr>
+          <p:cNvPr id="3" name="Text 1"/>
+          <p:cNvSpPr/>
+          <p:nvPr/>
+        </p:nvSpPr>
+        <p:spPr>
+          <a:xfrm>
+            <a:off x="365760" y="1005840"/>
+            <a:ext cx="11460175" cy="731520"/>
+          </a:xfrm>
+          <a:prstGeom prst="rect">
+            <a:avLst/>
+          </a:prstGeom>
+          <a:noFill/>
+          <a:ln/>
+        </p:spPr>
+        <p:txBody>
+          <a:bodyPr wrap="square" lIns="0" tIns="0" rIns="0" bIns="0" rtlCol="0" anchor="ctr">
+            <a:normAutofit/>
+          </a:bodyPr>
+          <a:lstStyle/>
+          <a:p>
+            <a:pPr algn="ctr" indent="0" marL="0">
+              <a:buNone/>
+            </a:pPr>
+            <a:r>
+              <a:rPr lang="en-US" sz="3600" b="1" dirty="0">
+                <a:solidFill>
+                  <a:srgbClr val="990011"/>
+                </a:solidFill>
+                <a:latin typeface="Times New Roman" pitchFamily="34" charset="0"/>
+                <a:ea typeface="Times New Roman" pitchFamily="34" charset="-122"/>
+                <a:cs typeface="Times New Roman" pitchFamily="34" charset="-120"/>
+              </a:rPr>
+              <a:t>1. Problems Faced</a:t>
+            </a:r>
+            <a:endParaRPr lang="en-US" sz="3600" dirty="0"/>
+          </a:p>
+        </p:txBody>
+      </p:sp>
+      <p:sp>
+        <p:nvSpPr>
+          <p:cNvPr id="4" name="Text 2"/>
+          <p:cNvSpPr/>
+          <p:nvPr/>
+        </p:nvSpPr>
+        <p:spPr>
+          <a:xfrm>
+            <a:off x="365760" y="1783080"/>
+            <a:ext cx="4846320" cy="4617720"/>
+          </a:xfrm>
+          <a:prstGeom prst="rect">
+            <a:avLst/>
+          </a:prstGeom>
+          <a:noFill/>
+          <a:ln/>
+        </p:spPr>
+        <p:txBody>
+          <a:bodyPr wrap="square" lIns="0" tIns="0" rIns="0" bIns="0" rtlCol="0" anchor="t"/>
+          <a:lstStyle/>
+          <a:p>
+            <a:pPr algn="l" marL="342900" indent="-342900">
+              <a:spcAft>
+                <a:spcPts val="800"/>
+              </a:spcAft>
+              <a:buSzPct val="100000"/>
+              <a:buChar char="•"/>
+            </a:pPr>
+            <a:r>
+              <a:rPr lang="en-US" sz="3600" b="1" dirty="0">
+                <a:solidFill>
+                  <a:srgbClr val="111111"/>
+                </a:solidFill>
+                <a:latin typeface="Times New Roman" pitchFamily="34" charset="0"/>
+                <a:ea typeface="Times New Roman" pitchFamily="34" charset="-122"/>
+                <a:cs typeface="Times New Roman" pitchFamily="34" charset="-120"/>
+              </a:rPr>
+              <a:t>Sandstorms and moving sand: </a:t>
+            </a:r>
+            <a:pPr algn="l" marL="342900" indent="-342900">
+              <a:spcAft>
+                <a:spcPts val="800"/>
+              </a:spcAft>
+              <a:buSzPct val="100000"/>
+              <a:buChar char="•"/>
+            </a:pPr>
+            <a:r>
+              <a:rPr lang="en-US" sz="3600" dirty="0">
+                <a:solidFill>
+                  <a:srgbClr val="111111"/>
+                </a:solidFill>
+                <a:latin typeface="Times New Roman" pitchFamily="34" charset="0"/>
+                <a:ea typeface="Times New Roman" pitchFamily="34" charset="-122"/>
+                <a:cs typeface="Times New Roman" pitchFamily="34" charset="-120"/>
+              </a:rPr>
+              <a:t>They bury roads, wells and fields.</a:t>
+            </a:r>
+            <a:endParaRPr lang="en-US" sz="3600" dirty="0"/>
+          </a:p>
+        </p:txBody>
+      </p:sp>
       <p:pic>
         <p:nvPicPr>
-          <p:cNvPr id="3" name="Image 0" descr="/home/claude/f4/img/minesec_sheet.png">    </p:cNvPr>
+          <p:cNvPr id="5" name="Image 0" descr="/home/claude/f4/img/v2/f2t_moving_sand.jpg">    </p:cNvPr>
           <p:cNvPicPr>
             <a:picLocks noChangeAspect="1"/>
           </p:cNvPicPr>
@@ -14373,8 +14715,8 @@
         </p:blipFill>
         <p:spPr>
           <a:xfrm>
-            <a:off x="0" y="658368"/>
-            <a:ext cx="2468880" cy="5833872"/>
+            <a:off x="5349240" y="2071212"/>
+            <a:ext cx="6659575" cy="3693983"/>
           </a:xfrm>
           <a:prstGeom prst="rect">
             <a:avLst/>
@@ -14383,14 +14725,14 @@
       </p:pic>
       <p:sp>
         <p:nvSpPr>
-          <p:cNvPr id="4" name="Text 1"/>
+          <p:cNvPr id="6" name="Text 3"/>
           <p:cNvSpPr/>
           <p:nvPr/>
         </p:nvSpPr>
         <p:spPr>
           <a:xfrm>
-            <a:off x="2697480" y="1005840"/>
-            <a:ext cx="9174175" cy="731520"/>
+            <a:off x="5349240" y="6089904"/>
+            <a:ext cx="6659575" cy="347472"/>
           </a:xfrm>
           <a:prstGeom prst="rect">
             <a:avLst/>
@@ -14399,142 +14741,24 @@
           <a:ln/>
         </p:spPr>
         <p:txBody>
-          <a:bodyPr wrap="square" lIns="0" tIns="0" rIns="0" bIns="0" rtlCol="0" anchor="ctr">
-            <a:normAutofit/>
-          </a:bodyPr>
+          <a:bodyPr wrap="square" lIns="0" tIns="0" rIns="0" bIns="0" rtlCol="0" anchor="ctr"/>
           <a:lstStyle/>
           <a:p>
             <a:pPr algn="ctr" indent="0" marL="0">
               <a:buNone/>
             </a:pPr>
             <a:r>
-              <a:rPr lang="en-US" sz="3600" b="1" dirty="0">
-                <a:solidFill>
-                  <a:srgbClr val="990011"/>
+              <a:rPr lang="en-US" sz="1600" i="1" dirty="0">
+                <a:solidFill>
+                  <a:srgbClr val="555555"/>
                 </a:solidFill>
                 <a:latin typeface="Times New Roman" pitchFamily="34" charset="0"/>
                 <a:ea typeface="Times New Roman" pitchFamily="34" charset="-122"/>
                 <a:cs typeface="Times New Roman" pitchFamily="34" charset="-120"/>
               </a:rPr>
-              <a:t>2. Adaptations</a:t>
-            </a:r>
-            <a:endParaRPr lang="en-US" sz="3600" dirty="0"/>
-          </a:p>
-        </p:txBody>
-      </p:sp>
-      <p:sp>
-        <p:nvSpPr>
-          <p:cNvPr id="5" name="Text 2"/>
-          <p:cNvSpPr/>
-          <p:nvPr/>
-        </p:nvSpPr>
-        <p:spPr>
-          <a:xfrm>
-            <a:off x="2697480" y="1783080"/>
-            <a:ext cx="9174175" cy="4663440"/>
-          </a:xfrm>
-          <a:prstGeom prst="rect">
-            <a:avLst/>
-          </a:prstGeom>
-          <a:noFill/>
-          <a:ln/>
-        </p:spPr>
-        <p:txBody>
-          <a:bodyPr wrap="square" lIns="0" tIns="0" rIns="0" bIns="0" rtlCol="0" anchor="t"/>
-          <a:lstStyle/>
-          <a:p>
-            <a:pPr algn="l" indent="0" marL="0">
-              <a:spcAft>
-                <a:spcPts val="800"/>
-              </a:spcAft>
-              <a:buNone/>
-            </a:pPr>
-            <a:r>
-              <a:rPr lang="en-US" sz="4000" i="1" dirty="0">
-                <a:solidFill>
-                  <a:srgbClr val="111111"/>
-                </a:solidFill>
-                <a:latin typeface="Times New Roman" pitchFamily="34" charset="0"/>
-                <a:ea typeface="Times New Roman" pitchFamily="34" charset="-122"/>
-                <a:cs typeface="Times New Roman" pitchFamily="34" charset="-120"/>
-              </a:rPr>
-              <a:t>People adapt to hot deserts in the following ways:</a:t>
-            </a:r>
-            <a:endParaRPr lang="en-US" sz="4000" dirty="0"/>
-          </a:p>
-          <a:p>
-            <a:pPr algn="l" indent="0" marL="0">
-              <a:spcAft>
-                <a:spcPts val="800"/>
-              </a:spcAft>
-              <a:buNone/>
-            </a:pPr>
-            <a:r>
-              <a:rPr lang="en-US" sz="4000" b="1" dirty="0">
-                <a:solidFill>
-                  <a:srgbClr val="111111"/>
-                </a:solidFill>
-                <a:latin typeface="Times New Roman" pitchFamily="34" charset="0"/>
-                <a:ea typeface="Times New Roman" pitchFamily="34" charset="-122"/>
-                <a:cs typeface="Times New Roman" pitchFamily="34" charset="-120"/>
-              </a:rPr>
-              <a:t>Nomadism: </a:t>
-            </a:r>
-            <a:pPr algn="l" indent="0" marL="0">
-              <a:spcAft>
-                <a:spcPts val="800"/>
-              </a:spcAft>
-              <a:buNone/>
-            </a:pPr>
-            <a:r>
-              <a:rPr lang="en-US" sz="4000" dirty="0">
-                <a:solidFill>
-                  <a:srgbClr val="111111"/>
-                </a:solidFill>
-                <a:latin typeface="Times New Roman" pitchFamily="34" charset="0"/>
-                <a:ea typeface="Times New Roman" pitchFamily="34" charset="-122"/>
-                <a:cs typeface="Times New Roman" pitchFamily="34" charset="-120"/>
-              </a:rPr>
-              <a:t>Nomads such as the Tuareg move with their animals to find water and pasture.</a:t>
-            </a:r>
-            <a:endParaRPr lang="en-US" sz="4000" dirty="0"/>
-          </a:p>
-          <a:p>
-            <a:pPr algn="l" indent="0" marL="0">
-              <a:spcAft>
-                <a:spcPts val="800"/>
-              </a:spcAft>
-              <a:buNone/>
-            </a:pPr>
-            <a:r>
-              <a:rPr lang="en-US" sz="4000" b="1" dirty="0">
-                <a:solidFill>
-                  <a:srgbClr val="111111"/>
-                </a:solidFill>
-                <a:latin typeface="Times New Roman" pitchFamily="34" charset="0"/>
-                <a:ea typeface="Times New Roman" pitchFamily="34" charset="-122"/>
-                <a:cs typeface="Times New Roman" pitchFamily="34" charset="-120"/>
-              </a:rPr>
-              <a:t>The camel: </a:t>
-            </a:r>
-            <a:pPr algn="l" indent="0" marL="0">
-              <a:spcAft>
-                <a:spcPts val="800"/>
-              </a:spcAft>
-              <a:buNone/>
-            </a:pPr>
-            <a:r>
-              <a:rPr lang="en-US" sz="4000" dirty="0">
-                <a:solidFill>
-                  <a:srgbClr val="111111"/>
-                </a:solidFill>
-                <a:latin typeface="Times New Roman" pitchFamily="34" charset="0"/>
-                <a:ea typeface="Times New Roman" pitchFamily="34" charset="-122"/>
-                <a:cs typeface="Times New Roman" pitchFamily="34" charset="-120"/>
-              </a:rPr>
-              <a:t>The camel carries people and goods for days without water.</a:t>
-            </a:r>
-            <a:endParaRPr lang="en-US" sz="4000" dirty="0"/>
+              <a:t>Illustration: moving sand</a:t>
+            </a:r>
+            <a:endParaRPr lang="en-US" sz="1600" dirty="0"/>
           </a:p>
         </p:txBody>
       </p:sp>
@@ -14709,7 +14933,7 @@
                 <a:ea typeface="Times New Roman" pitchFamily="34" charset="-122"/>
                 <a:cs typeface="Times New Roman" pitchFamily="34" charset="-120"/>
               </a:rPr>
-              <a:t>2. Adaptations (continued)</a:t>
+              <a:t>1. Problems Faced</a:t>
             </a:r>
             <a:endParaRPr lang="en-US" sz="3600" dirty="0"/>
           </a:p>
@@ -14736,11 +14960,12 @@
           <a:bodyPr wrap="square" lIns="0" tIns="0" rIns="0" bIns="0" rtlCol="0" anchor="t"/>
           <a:lstStyle/>
           <a:p>
-            <a:pPr algn="l" indent="0" marL="0">
+            <a:pPr algn="l" marL="342900" indent="-342900">
               <a:spcAft>
                 <a:spcPts val="800"/>
               </a:spcAft>
-              <a:buNone/>
+              <a:buSzPct val="100000"/>
+              <a:buChar char="•"/>
             </a:pPr>
             <a:r>
               <a:rPr lang="en-US" sz="4000" b="1" dirty="0">
@@ -14751,13 +14976,14 @@
                 <a:ea typeface="Times New Roman" pitchFamily="34" charset="-122"/>
                 <a:cs typeface="Times New Roman" pitchFamily="34" charset="-120"/>
               </a:rPr>
-              <a:t>Clothes and houses: </a:t>
-            </a:r>
-            <a:pPr algn="l" indent="0" marL="0">
+              <a:t>Poor soils: </a:t>
+            </a:r>
+            <a:pPr algn="l" marL="342900" indent="-342900">
               <a:spcAft>
                 <a:spcPts val="800"/>
               </a:spcAft>
-              <a:buNone/>
+              <a:buSzPct val="100000"/>
+              <a:buChar char="•"/>
             </a:pPr>
             <a:r>
               <a:rPr lang="en-US" sz="4000" dirty="0">
@@ -14768,16 +14994,17 @@
                 <a:ea typeface="Times New Roman" pitchFamily="34" charset="-122"/>
                 <a:cs typeface="Times New Roman" pitchFamily="34" charset="-120"/>
               </a:rPr>
-              <a:t>People wear long loose clothes and build houses with thick mud walls.</a:t>
+              <a:t>Few crops can grow.</a:t>
             </a:r>
             <a:endParaRPr lang="en-US" sz="4000" dirty="0"/>
           </a:p>
           <a:p>
-            <a:pPr algn="l" indent="0" marL="0">
+            <a:pPr algn="l" marL="342900" indent="-342900">
               <a:spcAft>
                 <a:spcPts val="800"/>
               </a:spcAft>
-              <a:buNone/>
+              <a:buSzPct val="100000"/>
+              <a:buChar char="•"/>
             </a:pPr>
             <a:r>
               <a:rPr lang="en-US" sz="4000" b="1" dirty="0">
@@ -14788,13 +15015,14 @@
                 <a:ea typeface="Times New Roman" pitchFamily="34" charset="-122"/>
                 <a:cs typeface="Times New Roman" pitchFamily="34" charset="-120"/>
               </a:rPr>
-              <a:t>Water supply: </a:t>
-            </a:r>
-            <a:pPr algn="l" indent="0" marL="0">
+              <a:t>Isolation: </a:t>
+            </a:r>
+            <a:pPr algn="l" marL="342900" indent="-342900">
               <a:spcAft>
                 <a:spcPts val="800"/>
               </a:spcAft>
-              <a:buNone/>
+              <a:buSzPct val="100000"/>
+              <a:buChar char="•"/>
             </a:pPr>
             <a:r>
               <a:rPr lang="en-US" sz="4000" dirty="0">
@@ -14805,7 +15033,7 @@
                 <a:ea typeface="Times New Roman" pitchFamily="34" charset="-122"/>
                 <a:cs typeface="Times New Roman" pitchFamily="34" charset="-120"/>
               </a:rPr>
-              <a:t>People dig wells and use desalination to get water.</a:t>
+              <a:t>Towns are far apart.</a:t>
             </a:r>
             <a:endParaRPr lang="en-US" sz="4000" dirty="0"/>
           </a:p>
@@ -15156,15 +15384,137 @@
                 <a:ea typeface="Calibri" pitchFamily="34" charset="-122"/>
                 <a:cs typeface="Calibri" pitchFamily="34" charset="-120"/>
               </a:rPr>
-              <a:t>FORMATIVE EVALUATION</a:t>
+              <a:t>BOARD SUMMARY</a:t>
             </a:r>
             <a:endParaRPr lang="en-US" sz="1400" dirty="0"/>
+          </a:p>
+        </p:txBody>
+      </p:sp>
+      <p:sp>
+        <p:nvSpPr>
+          <p:cNvPr id="3" name="Text 1"/>
+          <p:cNvSpPr/>
+          <p:nvPr/>
+        </p:nvSpPr>
+        <p:spPr>
+          <a:xfrm>
+            <a:off x="365760" y="1005840"/>
+            <a:ext cx="11460175" cy="731520"/>
+          </a:xfrm>
+          <a:prstGeom prst="rect">
+            <a:avLst/>
+          </a:prstGeom>
+          <a:noFill/>
+          <a:ln/>
+        </p:spPr>
+        <p:txBody>
+          <a:bodyPr wrap="square" lIns="0" tIns="0" rIns="0" bIns="0" rtlCol="0" anchor="ctr">
+            <a:normAutofit/>
+          </a:bodyPr>
+          <a:lstStyle/>
+          <a:p>
+            <a:pPr algn="ctr" indent="0" marL="0">
+              <a:buNone/>
+            </a:pPr>
+            <a:r>
+              <a:rPr lang="en-US" sz="3600" b="1" dirty="0">
+                <a:solidFill>
+                  <a:srgbClr val="990011"/>
+                </a:solidFill>
+                <a:latin typeface="Times New Roman" pitchFamily="34" charset="0"/>
+                <a:ea typeface="Times New Roman" pitchFamily="34" charset="-122"/>
+                <a:cs typeface="Times New Roman" pitchFamily="34" charset="-120"/>
+              </a:rPr>
+              <a:t>2. Adaptations</a:t>
+            </a:r>
+            <a:endParaRPr lang="en-US" sz="3600" dirty="0"/>
+          </a:p>
+        </p:txBody>
+      </p:sp>
+      <p:sp>
+        <p:nvSpPr>
+          <p:cNvPr id="4" name="Text 2"/>
+          <p:cNvSpPr/>
+          <p:nvPr/>
+        </p:nvSpPr>
+        <p:spPr>
+          <a:xfrm>
+            <a:off x="365760" y="1783080"/>
+            <a:ext cx="4846320" cy="4617720"/>
+          </a:xfrm>
+          <a:prstGeom prst="rect">
+            <a:avLst/>
+          </a:prstGeom>
+          <a:noFill/>
+          <a:ln/>
+        </p:spPr>
+        <p:txBody>
+          <a:bodyPr wrap="square" lIns="0" tIns="0" rIns="0" bIns="0" rtlCol="0" anchor="t"/>
+          <a:lstStyle/>
+          <a:p>
+            <a:pPr algn="l" indent="0" marL="0">
+              <a:spcAft>
+                <a:spcPts val="800"/>
+              </a:spcAft>
+              <a:buNone/>
+            </a:pPr>
+            <a:r>
+              <a:rPr lang="en-US" sz="3600" i="1" dirty="0">
+                <a:solidFill>
+                  <a:srgbClr val="111111"/>
+                </a:solidFill>
+                <a:latin typeface="Times New Roman" pitchFamily="34" charset="0"/>
+                <a:ea typeface="Times New Roman" pitchFamily="34" charset="-122"/>
+                <a:cs typeface="Times New Roman" pitchFamily="34" charset="-120"/>
+              </a:rPr>
+              <a:t>People adapt in the following ways:</a:t>
+            </a:r>
+            <a:endParaRPr lang="en-US" sz="3600" dirty="0"/>
+          </a:p>
+          <a:p>
+            <a:pPr algn="l" marL="342900" indent="-342900">
+              <a:spcAft>
+                <a:spcPts val="800"/>
+              </a:spcAft>
+              <a:buSzPct val="100000"/>
+              <a:buChar char="•"/>
+            </a:pPr>
+            <a:r>
+              <a:rPr lang="en-US" sz="3600" b="1" dirty="0">
+                <a:solidFill>
+                  <a:srgbClr val="111111"/>
+                </a:solidFill>
+                <a:latin typeface="Times New Roman" pitchFamily="34" charset="0"/>
+                <a:ea typeface="Times New Roman" pitchFamily="34" charset="-122"/>
+                <a:cs typeface="Times New Roman" pitchFamily="34" charset="-120"/>
+              </a:rPr>
+              <a:t>Nomadism: </a:t>
+            </a:r>
+            <a:pPr algn="l" marL="342900" indent="-342900">
+              <a:spcAft>
+                <a:spcPts val="800"/>
+              </a:spcAft>
+              <a:buSzPct val="100000"/>
+              <a:buChar char="•"/>
+            </a:pPr>
+            <a:r>
+              <a:rPr lang="en-US" sz="3600" dirty="0">
+                <a:solidFill>
+                  <a:srgbClr val="111111"/>
+                </a:solidFill>
+                <a:latin typeface="Times New Roman" pitchFamily="34" charset="0"/>
+                <a:ea typeface="Times New Roman" pitchFamily="34" charset="-122"/>
+                <a:cs typeface="Times New Roman" pitchFamily="34" charset="-120"/>
+              </a:rPr>
+              <a:t>Nomads move with camels and goats to find water and grass.</a:t>
+            </a:r>
+            <a:endParaRPr lang="en-US" sz="3600" dirty="0"/>
           </a:p>
         </p:txBody>
       </p:sp>
       <p:pic>
         <p:nvPicPr>
-          <p:cNvPr id="3" name="Image 0" descr="/home/claude/f4/img/minesec_sheet.png">    </p:cNvPr>
+          <p:cNvPr id="5" name="Image 0" descr="/home/claude/f4/img/v2/f2t_camels.jpg">    </p:cNvPr>
           <p:cNvPicPr>
             <a:picLocks noChangeAspect="1"/>
           </p:cNvPicPr>
@@ -15178,8 +15528,8 @@
         </p:blipFill>
         <p:spPr>
           <a:xfrm>
-            <a:off x="0" y="658368"/>
-            <a:ext cx="5120640" cy="5833872"/>
+            <a:off x="5349240" y="2071212"/>
+            <a:ext cx="6659575" cy="3693983"/>
           </a:xfrm>
           <a:prstGeom prst="rect">
             <a:avLst/>
@@ -15188,14 +15538,14 @@
       </p:pic>
       <p:sp>
         <p:nvSpPr>
-          <p:cNvPr id="4" name="Text 1"/>
+          <p:cNvPr id="6" name="Text 3"/>
           <p:cNvSpPr/>
           <p:nvPr/>
         </p:nvSpPr>
         <p:spPr>
           <a:xfrm>
-            <a:off x="5349240" y="1005840"/>
-            <a:ext cx="6522415" cy="731520"/>
+            <a:off x="5349240" y="6089904"/>
+            <a:ext cx="6659575" cy="347472"/>
           </a:xfrm>
           <a:prstGeom prst="rect">
             <a:avLst/>
@@ -15204,68 +15554,24 @@
           <a:ln/>
         </p:spPr>
         <p:txBody>
-          <a:bodyPr wrap="square" lIns="0" tIns="0" rIns="0" bIns="0" rtlCol="0" anchor="ctr">
-            <a:normAutofit/>
-          </a:bodyPr>
+          <a:bodyPr wrap="square" lIns="0" tIns="0" rIns="0" bIns="0" rtlCol="0" anchor="ctr"/>
           <a:lstStyle/>
           <a:p>
             <a:pPr algn="ctr" indent="0" marL="0">
               <a:buNone/>
             </a:pPr>
             <a:r>
-              <a:rPr lang="en-US" sz="3600" b="1" dirty="0">
-                <a:solidFill>
-                  <a:srgbClr val="990011"/>
+              <a:rPr lang="en-US" sz="1600" i="1" dirty="0">
+                <a:solidFill>
+                  <a:srgbClr val="555555"/>
                 </a:solidFill>
                 <a:latin typeface="Times New Roman" pitchFamily="34" charset="0"/>
                 <a:ea typeface="Times New Roman" pitchFamily="34" charset="-122"/>
                 <a:cs typeface="Times New Roman" pitchFamily="34" charset="-120"/>
               </a:rPr>
-              <a:t>Evaluation 1</a:t>
-            </a:r>
-            <a:endParaRPr lang="en-US" sz="3600" dirty="0"/>
-          </a:p>
-        </p:txBody>
-      </p:sp>
-      <p:sp>
-        <p:nvSpPr>
-          <p:cNvPr id="5" name="Text 2"/>
-          <p:cNvSpPr/>
-          <p:nvPr/>
-        </p:nvSpPr>
-        <p:spPr>
-          <a:xfrm>
-            <a:off x="5349240" y="1783080"/>
-            <a:ext cx="6522415" cy="4663440"/>
-          </a:xfrm>
-          <a:prstGeom prst="rect">
-            <a:avLst/>
-          </a:prstGeom>
-          <a:noFill/>
-          <a:ln/>
-        </p:spPr>
-        <p:txBody>
-          <a:bodyPr wrap="square" lIns="0" tIns="0" rIns="0" bIns="0" rtlCol="0" anchor="t"/>
-          <a:lstStyle/>
-          <a:p>
-            <a:pPr algn="l" indent="0" marL="0">
-              <a:spcAft>
-                <a:spcPts val="800"/>
-              </a:spcAft>
-              <a:buNone/>
-            </a:pPr>
-            <a:r>
-              <a:rPr lang="en-US" sz="4000" dirty="0">
-                <a:solidFill>
-                  <a:srgbClr val="111111"/>
-                </a:solidFill>
-                <a:latin typeface="Times New Roman" pitchFamily="34" charset="0"/>
-                <a:ea typeface="Times New Roman" pitchFamily="34" charset="-122"/>
-                <a:cs typeface="Times New Roman" pitchFamily="34" charset="-120"/>
-              </a:rPr>
-              <a:t>Give two problems of desert people.</a:t>
-            </a:r>
-            <a:endParaRPr lang="en-US" sz="4000" dirty="0"/>
+              <a:t>Illustration: camels</a:t>
+            </a:r>
+            <a:endParaRPr lang="en-US" sz="1600" dirty="0"/>
           </a:p>
         </p:txBody>
       </p:sp>
@@ -15375,15 +15681,117 @@
                 <a:ea typeface="Calibri" pitchFamily="34" charset="-122"/>
                 <a:cs typeface="Calibri" pitchFamily="34" charset="-120"/>
               </a:rPr>
-              <a:t>FORMATIVE EVALUATION</a:t>
+              <a:t>BOARD SUMMARY</a:t>
             </a:r>
             <a:endParaRPr lang="en-US" sz="1400" dirty="0"/>
+          </a:p>
+        </p:txBody>
+      </p:sp>
+      <p:sp>
+        <p:nvSpPr>
+          <p:cNvPr id="3" name="Text 1"/>
+          <p:cNvSpPr/>
+          <p:nvPr/>
+        </p:nvSpPr>
+        <p:spPr>
+          <a:xfrm>
+            <a:off x="365760" y="1005840"/>
+            <a:ext cx="11460175" cy="731520"/>
+          </a:xfrm>
+          <a:prstGeom prst="rect">
+            <a:avLst/>
+          </a:prstGeom>
+          <a:noFill/>
+          <a:ln/>
+        </p:spPr>
+        <p:txBody>
+          <a:bodyPr wrap="square" lIns="0" tIns="0" rIns="0" bIns="0" rtlCol="0" anchor="ctr">
+            <a:normAutofit/>
+          </a:bodyPr>
+          <a:lstStyle/>
+          <a:p>
+            <a:pPr algn="ctr" indent="0" marL="0">
+              <a:buNone/>
+            </a:pPr>
+            <a:r>
+              <a:rPr lang="en-US" sz="3600" b="1" dirty="0">
+                <a:solidFill>
+                  <a:srgbClr val="990011"/>
+                </a:solidFill>
+                <a:latin typeface="Times New Roman" pitchFamily="34" charset="0"/>
+                <a:ea typeface="Times New Roman" pitchFamily="34" charset="-122"/>
+                <a:cs typeface="Times New Roman" pitchFamily="34" charset="-120"/>
+              </a:rPr>
+              <a:t>2. Adaptations</a:t>
+            </a:r>
+            <a:endParaRPr lang="en-US" sz="3600" dirty="0"/>
+          </a:p>
+        </p:txBody>
+      </p:sp>
+      <p:sp>
+        <p:nvSpPr>
+          <p:cNvPr id="4" name="Text 2"/>
+          <p:cNvSpPr/>
+          <p:nvPr/>
+        </p:nvSpPr>
+        <p:spPr>
+          <a:xfrm>
+            <a:off x="365760" y="1783080"/>
+            <a:ext cx="4846320" cy="4617720"/>
+          </a:xfrm>
+          <a:prstGeom prst="rect">
+            <a:avLst/>
+          </a:prstGeom>
+          <a:noFill/>
+          <a:ln/>
+        </p:spPr>
+        <p:txBody>
+          <a:bodyPr wrap="square" lIns="0" tIns="0" rIns="0" bIns="0" rtlCol="0" anchor="t"/>
+          <a:lstStyle/>
+          <a:p>
+            <a:pPr algn="l" marL="342900" indent="-342900">
+              <a:spcAft>
+                <a:spcPts val="800"/>
+              </a:spcAft>
+              <a:buSzPct val="100000"/>
+              <a:buChar char="•"/>
+            </a:pPr>
+            <a:r>
+              <a:rPr lang="en-US" sz="3600" b="1" dirty="0">
+                <a:solidFill>
+                  <a:srgbClr val="111111"/>
+                </a:solidFill>
+                <a:latin typeface="Times New Roman" pitchFamily="34" charset="0"/>
+                <a:ea typeface="Times New Roman" pitchFamily="34" charset="-122"/>
+                <a:cs typeface="Times New Roman" pitchFamily="34" charset="-120"/>
+              </a:rPr>
+              <a:t>Clothes: </a:t>
+            </a:r>
+            <a:pPr algn="l" marL="342900" indent="-342900">
+              <a:spcAft>
+                <a:spcPts val="800"/>
+              </a:spcAft>
+              <a:buSzPct val="100000"/>
+              <a:buChar char="•"/>
+            </a:pPr>
+            <a:r>
+              <a:rPr lang="en-US" sz="3600" dirty="0">
+                <a:solidFill>
+                  <a:srgbClr val="111111"/>
+                </a:solidFill>
+                <a:latin typeface="Times New Roman" pitchFamily="34" charset="0"/>
+                <a:ea typeface="Times New Roman" pitchFamily="34" charset="-122"/>
+                <a:cs typeface="Times New Roman" pitchFamily="34" charset="-120"/>
+              </a:rPr>
+              <a:t>Long, loose clothes and turbans.</a:t>
+            </a:r>
+            <a:endParaRPr lang="en-US" sz="3600" dirty="0"/>
           </a:p>
         </p:txBody>
       </p:sp>
       <p:pic>
         <p:nvPicPr>
-          <p:cNvPr id="3" name="Image 0" descr="/home/claude/f4/img/minesec_sheet.png">    </p:cNvPr>
+          <p:cNvPr id="5" name="Image 0" descr="/home/claude/f4/img/v2/f2t_tuareg.jpg">    </p:cNvPr>
           <p:cNvPicPr>
             <a:picLocks noChangeAspect="1"/>
           </p:cNvPicPr>
@@ -15397,8 +15805,8 @@
         </p:blipFill>
         <p:spPr>
           <a:xfrm>
-            <a:off x="0" y="658368"/>
-            <a:ext cx="5120640" cy="5833872"/>
+            <a:off x="5349240" y="2069407"/>
+            <a:ext cx="6659575" cy="3697594"/>
           </a:xfrm>
           <a:prstGeom prst="rect">
             <a:avLst/>
@@ -15407,14 +15815,14 @@
       </p:pic>
       <p:sp>
         <p:nvSpPr>
-          <p:cNvPr id="4" name="Text 1"/>
+          <p:cNvPr id="6" name="Text 3"/>
           <p:cNvSpPr/>
           <p:nvPr/>
         </p:nvSpPr>
         <p:spPr>
           <a:xfrm>
-            <a:off x="5349240" y="1005840"/>
-            <a:ext cx="6522415" cy="731520"/>
+            <a:off x="5349240" y="6089904"/>
+            <a:ext cx="6659575" cy="347472"/>
           </a:xfrm>
           <a:prstGeom prst="rect">
             <a:avLst/>
@@ -15423,68 +15831,24 @@
           <a:ln/>
         </p:spPr>
         <p:txBody>
-          <a:bodyPr wrap="square" lIns="0" tIns="0" rIns="0" bIns="0" rtlCol="0" anchor="ctr">
-            <a:normAutofit/>
-          </a:bodyPr>
+          <a:bodyPr wrap="square" lIns="0" tIns="0" rIns="0" bIns="0" rtlCol="0" anchor="ctr"/>
           <a:lstStyle/>
           <a:p>
             <a:pPr algn="ctr" indent="0" marL="0">
               <a:buNone/>
             </a:pPr>
             <a:r>
-              <a:rPr lang="en-US" sz="3600" b="1" dirty="0">
-                <a:solidFill>
-                  <a:srgbClr val="990011"/>
+              <a:rPr lang="en-US" sz="1600" i="1" dirty="0">
+                <a:solidFill>
+                  <a:srgbClr val="555555"/>
                 </a:solidFill>
                 <a:latin typeface="Times New Roman" pitchFamily="34" charset="0"/>
                 <a:ea typeface="Times New Roman" pitchFamily="34" charset="-122"/>
                 <a:cs typeface="Times New Roman" pitchFamily="34" charset="-120"/>
               </a:rPr>
-              <a:t>Expected Answer</a:t>
-            </a:r>
-            <a:endParaRPr lang="en-US" sz="3600" dirty="0"/>
-          </a:p>
-        </p:txBody>
-      </p:sp>
-      <p:sp>
-        <p:nvSpPr>
-          <p:cNvPr id="5" name="Text 2"/>
-          <p:cNvSpPr/>
-          <p:nvPr/>
-        </p:nvSpPr>
-        <p:spPr>
-          <a:xfrm>
-            <a:off x="5349240" y="1783080"/>
-            <a:ext cx="6522415" cy="4663440"/>
-          </a:xfrm>
-          <a:prstGeom prst="rect">
-            <a:avLst/>
-          </a:prstGeom>
-          <a:noFill/>
-          <a:ln/>
-        </p:spPr>
-        <p:txBody>
-          <a:bodyPr wrap="square" lIns="0" tIns="0" rIns="0" bIns="0" rtlCol="0" anchor="t"/>
-          <a:lstStyle/>
-          <a:p>
-            <a:pPr algn="l" indent="0" marL="0">
-              <a:spcAft>
-                <a:spcPts val="800"/>
-              </a:spcAft>
-              <a:buNone/>
-            </a:pPr>
-            <a:r>
-              <a:rPr lang="en-US" sz="4000" dirty="0">
-                <a:solidFill>
-                  <a:srgbClr val="111111"/>
-                </a:solidFill>
-                <a:latin typeface="Times New Roman" pitchFamily="34" charset="0"/>
-                <a:ea typeface="Times New Roman" pitchFamily="34" charset="-122"/>
-                <a:cs typeface="Times New Roman" pitchFamily="34" charset="-120"/>
-              </a:rPr>
-              <a:t>Lack of water and sandstorms.</a:t>
-            </a:r>
-            <a:endParaRPr lang="en-US" sz="4000" dirty="0"/>
+              <a:t>Illustration: Tuareg people</a:t>
+            </a:r>
+            <a:endParaRPr lang="en-US" sz="1600" dirty="0"/>
           </a:p>
         </p:txBody>
       </p:sp>
@@ -15594,7 +15958,7 @@
                 <a:ea typeface="Calibri" pitchFamily="34" charset="-122"/>
                 <a:cs typeface="Calibri" pitchFamily="34" charset="-120"/>
               </a:rPr>
-              <a:t>FORMATIVE EVALUATION</a:t>
+              <a:t>BOARD SUMMARY</a:t>
             </a:r>
             <a:endParaRPr lang="en-US" sz="1400" dirty="0"/>
           </a:p>
@@ -15617,7 +15981,7 @@
         <p:spPr>
           <a:xfrm>
             <a:off x="0" y="658368"/>
-            <a:ext cx="5120640" cy="5833872"/>
+            <a:ext cx="3840480" cy="5833872"/>
           </a:xfrm>
           <a:prstGeom prst="rect">
             <a:avLst/>
@@ -15632,8 +15996,8 @@
         </p:nvSpPr>
         <p:spPr>
           <a:xfrm>
-            <a:off x="5349240" y="1005840"/>
-            <a:ext cx="6522415" cy="731520"/>
+            <a:off x="4069080" y="1005840"/>
+            <a:ext cx="7802575" cy="731520"/>
           </a:xfrm>
           <a:prstGeom prst="rect">
             <a:avLst/>
@@ -15659,7 +16023,7 @@
                 <a:ea typeface="Times New Roman" pitchFamily="34" charset="-122"/>
                 <a:cs typeface="Times New Roman" pitchFamily="34" charset="-120"/>
               </a:rPr>
-              <a:t>Evaluation 2</a:t>
+              <a:t>2. Adaptations</a:t>
             </a:r>
             <a:endParaRPr lang="en-US" sz="3600" dirty="0"/>
           </a:p>
@@ -15673,8 +16037,8 @@
         </p:nvSpPr>
         <p:spPr>
           <a:xfrm>
-            <a:off x="5349240" y="1783080"/>
-            <a:ext cx="6522415" cy="4663440"/>
+            <a:off x="4069080" y="1783080"/>
+            <a:ext cx="7802575" cy="4663440"/>
           </a:xfrm>
           <a:prstGeom prst="rect">
             <a:avLst/>
@@ -15686,14 +16050,15 @@
           <a:bodyPr wrap="square" lIns="0" tIns="0" rIns="0" bIns="0" rtlCol="0" anchor="t"/>
           <a:lstStyle/>
           <a:p>
-            <a:pPr algn="l" indent="0" marL="0">
+            <a:pPr algn="l" marL="342900" indent="-342900">
               <a:spcAft>
                 <a:spcPts val="800"/>
               </a:spcAft>
-              <a:buNone/>
+              <a:buSzPct val="100000"/>
+              <a:buChar char="•"/>
             </a:pPr>
             <a:r>
-              <a:rPr lang="en-US" sz="4000" dirty="0">
+              <a:rPr lang="en-US" sz="4000" b="1" dirty="0">
                 <a:solidFill>
                   <a:srgbClr val="111111"/>
                 </a:solidFill>
@@ -15701,7 +16066,103 @@
                 <a:ea typeface="Times New Roman" pitchFamily="34" charset="-122"/>
                 <a:cs typeface="Times New Roman" pitchFamily="34" charset="-120"/>
               </a:rPr>
-              <a:t>Why is the camel useful in the desert?</a:t>
+              <a:t>Houses: </a:t>
+            </a:r>
+            <a:pPr algn="l" marL="342900" indent="-342900">
+              <a:spcAft>
+                <a:spcPts val="800"/>
+              </a:spcAft>
+              <a:buSzPct val="100000"/>
+              <a:buChar char="•"/>
+            </a:pPr>
+            <a:r>
+              <a:rPr lang="en-US" sz="4000" dirty="0">
+                <a:solidFill>
+                  <a:srgbClr val="111111"/>
+                </a:solidFill>
+                <a:latin typeface="Times New Roman" pitchFamily="34" charset="0"/>
+                <a:ea typeface="Times New Roman" pitchFamily="34" charset="-122"/>
+                <a:cs typeface="Times New Roman" pitchFamily="34" charset="-120"/>
+              </a:rPr>
+              <a:t>Thick mud walls and small windows keep houses cool.</a:t>
+            </a:r>
+            <a:endParaRPr lang="en-US" sz="4000" dirty="0"/>
+          </a:p>
+          <a:p>
+            <a:pPr algn="l" marL="342900" indent="-342900">
+              <a:spcAft>
+                <a:spcPts val="800"/>
+              </a:spcAft>
+              <a:buSzPct val="100000"/>
+              <a:buChar char="•"/>
+            </a:pPr>
+            <a:r>
+              <a:rPr lang="en-US" sz="4000" b="1" dirty="0">
+                <a:solidFill>
+                  <a:srgbClr val="111111"/>
+                </a:solidFill>
+                <a:latin typeface="Times New Roman" pitchFamily="34" charset="0"/>
+                <a:ea typeface="Times New Roman" pitchFamily="34" charset="-122"/>
+                <a:cs typeface="Times New Roman" pitchFamily="34" charset="-120"/>
+              </a:rPr>
+              <a:t>Water: </a:t>
+            </a:r>
+            <a:pPr algn="l" marL="342900" indent="-342900">
+              <a:spcAft>
+                <a:spcPts val="800"/>
+              </a:spcAft>
+              <a:buSzPct val="100000"/>
+              <a:buChar char="•"/>
+            </a:pPr>
+            <a:r>
+              <a:rPr lang="en-US" sz="4000" dirty="0">
+                <a:solidFill>
+                  <a:srgbClr val="111111"/>
+                </a:solidFill>
+                <a:latin typeface="Times New Roman" pitchFamily="34" charset="0"/>
+                <a:ea typeface="Times New Roman" pitchFamily="34" charset="-122"/>
+                <a:cs typeface="Times New Roman" pitchFamily="34" charset="-120"/>
+              </a:rPr>
+              <a:t>Deep wells, boreholes and desalination.</a:t>
+            </a:r>
+            <a:endParaRPr lang="en-US" sz="4000" dirty="0"/>
+          </a:p>
+          <a:p>
+            <a:pPr algn="l" marL="342900" indent="-342900">
+              <a:spcAft>
+                <a:spcPts val="800"/>
+              </a:spcAft>
+              <a:buSzPct val="100000"/>
+              <a:buChar char="•"/>
+            </a:pPr>
+            <a:r>
+              <a:rPr lang="en-US" sz="4000" b="1" dirty="0">
+                <a:solidFill>
+                  <a:srgbClr val="111111"/>
+                </a:solidFill>
+                <a:latin typeface="Times New Roman" pitchFamily="34" charset="0"/>
+                <a:ea typeface="Times New Roman" pitchFamily="34" charset="-122"/>
+                <a:cs typeface="Times New Roman" pitchFamily="34" charset="-120"/>
+              </a:rPr>
+              <a:t>Irrigation: </a:t>
+            </a:r>
+            <a:pPr algn="l" marL="342900" indent="-342900">
+              <a:spcAft>
+                <a:spcPts val="800"/>
+              </a:spcAft>
+              <a:buSzPct val="100000"/>
+              <a:buChar char="•"/>
+            </a:pPr>
+            <a:r>
+              <a:rPr lang="en-US" sz="4000" dirty="0">
+                <a:solidFill>
+                  <a:srgbClr val="111111"/>
+                </a:solidFill>
+                <a:latin typeface="Times New Roman" pitchFamily="34" charset="0"/>
+                <a:ea typeface="Times New Roman" pitchFamily="34" charset="-122"/>
+                <a:cs typeface="Times New Roman" pitchFamily="34" charset="-120"/>
+              </a:rPr>
+              <a:t>Farming in oases and along rivers.</a:t>
             </a:r>
             <a:endParaRPr lang="en-US" sz="4000" dirty="0"/>
           </a:p>
@@ -15878,7 +16339,7 @@
                 <a:ea typeface="Times New Roman" pitchFamily="34" charset="-122"/>
                 <a:cs typeface="Times New Roman" pitchFamily="34" charset="-120"/>
               </a:rPr>
-              <a:t>Expected Answer</a:t>
+              <a:t>Evaluation 1</a:t>
             </a:r>
             <a:endParaRPr lang="en-US" sz="3600" dirty="0"/>
           </a:p>
@@ -15920,7 +16381,7 @@
                 <a:ea typeface="Times New Roman" pitchFamily="34" charset="-122"/>
                 <a:cs typeface="Times New Roman" pitchFamily="34" charset="-120"/>
               </a:rPr>
-              <a:t>It walks for days without water and carries heavy loads.</a:t>
+              <a:t>Give two problems of desert people.</a:t>
             </a:r>
             <a:endParaRPr lang="en-US" sz="4000" dirty="0"/>
           </a:p>
@@ -16032,7 +16493,7 @@
                 <a:ea typeface="Calibri" pitchFamily="34" charset="-122"/>
                 <a:cs typeface="Calibri" pitchFamily="34" charset="-120"/>
               </a:rPr>
-              <a:t>REMEDIATION</a:t>
+              <a:t>FORMATIVE EVALUATION</a:t>
             </a:r>
             <a:endParaRPr lang="en-US" sz="1400" dirty="0"/>
           </a:p>
@@ -16055,7 +16516,7 @@
         <p:spPr>
           <a:xfrm>
             <a:off x="0" y="658368"/>
-            <a:ext cx="1463040" cy="5833872"/>
+            <a:ext cx="5120640" cy="5833872"/>
           </a:xfrm>
           <a:prstGeom prst="rect">
             <a:avLst/>
@@ -16070,8 +16531,8 @@
         </p:nvSpPr>
         <p:spPr>
           <a:xfrm>
-            <a:off x="1691640" y="1005840"/>
-            <a:ext cx="10180015" cy="731520"/>
+            <a:off x="5349240" y="1005840"/>
+            <a:ext cx="6522415" cy="731520"/>
           </a:xfrm>
           <a:prstGeom prst="rect">
             <a:avLst/>
@@ -16097,7 +16558,7 @@
                 <a:ea typeface="Times New Roman" pitchFamily="34" charset="-122"/>
                 <a:cs typeface="Times New Roman" pitchFamily="34" charset="-120"/>
               </a:rPr>
-              <a:t>Remediation</a:t>
+              <a:t>Expected Answer</a:t>
             </a:r>
             <a:endParaRPr lang="en-US" sz="3600" dirty="0"/>
           </a:p>
@@ -16111,8 +16572,8 @@
         </p:nvSpPr>
         <p:spPr>
           <a:xfrm>
-            <a:off x="1691640" y="1783080"/>
-            <a:ext cx="10180015" cy="4663440"/>
+            <a:off x="5349240" y="1783080"/>
+            <a:ext cx="6522415" cy="4663440"/>
           </a:xfrm>
           <a:prstGeom prst="rect">
             <a:avLst/>
@@ -16131,7 +16592,7 @@
               <a:buNone/>
             </a:pPr>
             <a:r>
-              <a:rPr lang="en-US" sz="4000" b="1" dirty="0">
+              <a:rPr lang="en-US" sz="4000" dirty="0">
                 <a:solidFill>
                   <a:srgbClr val="111111"/>
                 </a:solidFill>
@@ -16139,73 +16600,7 @@
                 <a:ea typeface="Times New Roman" pitchFamily="34" charset="-122"/>
                 <a:cs typeface="Times New Roman" pitchFamily="34" charset="-120"/>
               </a:rPr>
-              <a:t>Fill in the blanks:</a:t>
-            </a:r>
-            <a:endParaRPr lang="en-US" sz="4000" dirty="0"/>
-          </a:p>
-          <a:p>
-            <a:pPr algn="l" marL="342900" indent="-342900">
-              <a:spcAft>
-                <a:spcPts val="800"/>
-              </a:spcAft>
-              <a:buSzPct val="100000"/>
-              <a:buFont typeface="+mj-lt"/>
-              <a:buAutoNum type="arabicPeriod" startAt="1"/>
-            </a:pPr>
-            <a:r>
-              <a:rPr lang="en-US" sz="4000" dirty="0">
-                <a:solidFill>
-                  <a:srgbClr val="111111"/>
-                </a:solidFill>
-                <a:latin typeface="Times New Roman" pitchFamily="34" charset="0"/>
-                <a:ea typeface="Times New Roman" pitchFamily="34" charset="-122"/>
-                <a:cs typeface="Times New Roman" pitchFamily="34" charset="-120"/>
-              </a:rPr>
-              <a:t>A person who moves with his animals is a ______.</a:t>
-            </a:r>
-            <a:endParaRPr lang="en-US" sz="4000" dirty="0"/>
-          </a:p>
-          <a:p>
-            <a:pPr algn="l" marL="342900" indent="-342900">
-              <a:spcAft>
-                <a:spcPts val="800"/>
-              </a:spcAft>
-              <a:buSzPct val="100000"/>
-              <a:buFont typeface="+mj-lt"/>
-              <a:buAutoNum type="arabicPeriod" startAt="1"/>
-            </a:pPr>
-            <a:r>
-              <a:rPr lang="en-US" sz="4000" dirty="0">
-                <a:solidFill>
-                  <a:srgbClr val="111111"/>
-                </a:solidFill>
-                <a:latin typeface="Times New Roman" pitchFamily="34" charset="0"/>
-                <a:ea typeface="Times New Roman" pitchFamily="34" charset="-122"/>
-                <a:cs typeface="Times New Roman" pitchFamily="34" charset="-120"/>
-              </a:rPr>
-              <a:t>The "ship of the desert" is the ______.</a:t>
-            </a:r>
-            <a:endParaRPr lang="en-US" sz="4000" dirty="0"/>
-          </a:p>
-          <a:p>
-            <a:pPr algn="l" marL="342900" indent="-342900">
-              <a:spcAft>
-                <a:spcPts val="800"/>
-              </a:spcAft>
-              <a:buSzPct val="100000"/>
-              <a:buFont typeface="+mj-lt"/>
-              <a:buAutoNum type="arabicPeriod" startAt="1"/>
-            </a:pPr>
-            <a:r>
-              <a:rPr lang="en-US" sz="4000" dirty="0">
-                <a:solidFill>
-                  <a:srgbClr val="111111"/>
-                </a:solidFill>
-                <a:latin typeface="Times New Roman" pitchFamily="34" charset="0"/>
-                <a:ea typeface="Times New Roman" pitchFamily="34" charset="-122"/>
-                <a:cs typeface="Times New Roman" pitchFamily="34" charset="-120"/>
-              </a:rPr>
-              <a:t>Removing salt from sea water is called ______.</a:t>
+              <a:t>Lack of water and sandstorms.</a:t>
             </a:r>
             <a:endParaRPr lang="en-US" sz="4000" dirty="0"/>
           </a:p>
@@ -16317,7 +16712,7 @@
                 <a:ea typeface="Calibri" pitchFamily="34" charset="-122"/>
                 <a:cs typeface="Calibri" pitchFamily="34" charset="-120"/>
               </a:rPr>
-              <a:t>HOMEWORK</a:t>
+              <a:t>FORMATIVE EVALUATION</a:t>
             </a:r>
             <a:endParaRPr lang="en-US" sz="1400" dirty="0"/>
           </a:p>
@@ -16382,7 +16777,7 @@
                 <a:ea typeface="Times New Roman" pitchFamily="34" charset="-122"/>
                 <a:cs typeface="Times New Roman" pitchFamily="34" charset="-120"/>
               </a:rPr>
-              <a:t>Homework</a:t>
+              <a:t>Evaluation 2</a:t>
             </a:r>
             <a:endParaRPr lang="en-US" sz="3600" dirty="0"/>
           </a:p>
@@ -16424,7 +16819,7 @@
                 <a:ea typeface="Times New Roman" pitchFamily="34" charset="-122"/>
                 <a:cs typeface="Times New Roman" pitchFamily="34" charset="-120"/>
               </a:rPr>
-              <a:t>Find in your textbook or atlas the name of one oasis in the Sahara, and write the name of the country where it is found.</a:t>
+              <a:t>Why is the camel useful in the desert?</a:t>
             </a:r>
             <a:endParaRPr lang="en-US" sz="4000" dirty="0"/>
           </a:p>
@@ -16536,7 +16931,7 @@
                 <a:ea typeface="Calibri" pitchFamily="34" charset="-122"/>
                 <a:cs typeface="Calibri" pitchFamily="34" charset="-120"/>
               </a:rPr>
-              <a:t>NEXT LESSON</a:t>
+              <a:t>FORMATIVE EVALUATION</a:t>
             </a:r>
             <a:endParaRPr lang="en-US" sz="1400" dirty="0"/>
           </a:p>
@@ -16601,7 +16996,7 @@
                 <a:ea typeface="Times New Roman" pitchFamily="34" charset="-122"/>
                 <a:cs typeface="Times New Roman" pitchFamily="34" charset="-120"/>
               </a:rPr>
-              <a:t>Next Lesson</a:t>
+              <a:t>Expected Answer</a:t>
             </a:r>
             <a:endParaRPr lang="en-US" sz="3600" dirty="0"/>
           </a:p>
@@ -16625,17 +17020,17 @@
           <a:ln/>
         </p:spPr>
         <p:txBody>
-          <a:bodyPr wrap="square" lIns="0" tIns="0" rIns="0" bIns="0" rtlCol="0" anchor="ctr"/>
-          <a:lstStyle/>
-          <a:p>
-            <a:pPr algn="ctr" indent="0" marL="0">
+          <a:bodyPr wrap="square" lIns="0" tIns="0" rIns="0" bIns="0" rtlCol="0" anchor="t"/>
+          <a:lstStyle/>
+          <a:p>
+            <a:pPr algn="l" indent="0" marL="0">
               <a:spcAft>
                 <a:spcPts val="800"/>
               </a:spcAft>
               <a:buNone/>
             </a:pPr>
             <a:r>
-              <a:rPr lang="en-US" sz="4000" b="1" dirty="0">
+              <a:rPr lang="en-US" sz="4000" dirty="0">
                 <a:solidFill>
                   <a:srgbClr val="111111"/>
                 </a:solidFill>
@@ -16643,27 +17038,7 @@
                 <a:ea typeface="Times New Roman" pitchFamily="34" charset="-122"/>
                 <a:cs typeface="Times New Roman" pitchFamily="34" charset="-120"/>
               </a:rPr>
-              <a:t>Our next lesson will be on:</a:t>
-            </a:r>
-            <a:endParaRPr lang="en-US" sz="4000" dirty="0"/>
-          </a:p>
-          <a:p>
-            <a:pPr algn="ctr" indent="0" marL="0">
-              <a:spcAft>
-                <a:spcPts val="800"/>
-              </a:spcAft>
-              <a:buNone/>
-            </a:pPr>
-            <a:r>
-              <a:rPr lang="en-US" sz="4000" b="1" dirty="0">
-                <a:solidFill>
-                  <a:srgbClr val="990011"/>
-                </a:solidFill>
-                <a:latin typeface="Times New Roman" pitchFamily="34" charset="0"/>
-                <a:ea typeface="Times New Roman" pitchFamily="34" charset="-122"/>
-                <a:cs typeface="Times New Roman" pitchFamily="34" charset="-120"/>
-              </a:rPr>
-              <a:t>Lesson 3 (Part 5): The Desert Regions: Human Activities (Farming around Oases)</a:t>
+              <a:t>It walks for days without water and carries heavy loads.</a:t>
             </a:r>
             <a:endParaRPr lang="en-US" sz="4000" dirty="0"/>
           </a:p>
@@ -16775,6 +17150,968 @@
                 <a:ea typeface="Calibri" pitchFamily="34" charset="-122"/>
                 <a:cs typeface="Calibri" pitchFamily="34" charset="-120"/>
               </a:rPr>
+              <a:t>REMEDIATION</a:t>
+            </a:r>
+            <a:endParaRPr lang="en-US" sz="1400" dirty="0"/>
+          </a:p>
+        </p:txBody>
+      </p:sp>
+      <p:pic>
+        <p:nvPicPr>
+          <p:cNvPr id="3" name="Image 0" descr="/home/claude/f4/img/minesec_sheet.png">    </p:cNvPr>
+          <p:cNvPicPr>
+            <a:picLocks noChangeAspect="1"/>
+          </p:cNvPicPr>
+          <p:nvPr/>
+        </p:nvPicPr>
+        <p:blipFill>
+          <a:blip r:embed="rId1"/>
+          <a:stretch>
+            <a:fillRect/>
+          </a:stretch>
+        </p:blipFill>
+        <p:spPr>
+          <a:xfrm>
+            <a:off x="0" y="658368"/>
+            <a:ext cx="1463040" cy="5833872"/>
+          </a:xfrm>
+          <a:prstGeom prst="rect">
+            <a:avLst/>
+          </a:prstGeom>
+        </p:spPr>
+      </p:pic>
+      <p:sp>
+        <p:nvSpPr>
+          <p:cNvPr id="4" name="Text 1"/>
+          <p:cNvSpPr/>
+          <p:nvPr/>
+        </p:nvSpPr>
+        <p:spPr>
+          <a:xfrm>
+            <a:off x="1691640" y="1005840"/>
+            <a:ext cx="10180015" cy="731520"/>
+          </a:xfrm>
+          <a:prstGeom prst="rect">
+            <a:avLst/>
+          </a:prstGeom>
+          <a:noFill/>
+          <a:ln/>
+        </p:spPr>
+        <p:txBody>
+          <a:bodyPr wrap="square" lIns="0" tIns="0" rIns="0" bIns="0" rtlCol="0" anchor="ctr">
+            <a:normAutofit/>
+          </a:bodyPr>
+          <a:lstStyle/>
+          <a:p>
+            <a:pPr algn="ctr" indent="0" marL="0">
+              <a:buNone/>
+            </a:pPr>
+            <a:r>
+              <a:rPr lang="en-US" sz="3600" b="1" dirty="0">
+                <a:solidFill>
+                  <a:srgbClr val="990011"/>
+                </a:solidFill>
+                <a:latin typeface="Times New Roman" pitchFamily="34" charset="0"/>
+                <a:ea typeface="Times New Roman" pitchFamily="34" charset="-122"/>
+                <a:cs typeface="Times New Roman" pitchFamily="34" charset="-120"/>
+              </a:rPr>
+              <a:t>Remediation</a:t>
+            </a:r>
+            <a:endParaRPr lang="en-US" sz="3600" dirty="0"/>
+          </a:p>
+        </p:txBody>
+      </p:sp>
+      <p:sp>
+        <p:nvSpPr>
+          <p:cNvPr id="5" name="Text 2"/>
+          <p:cNvSpPr/>
+          <p:nvPr/>
+        </p:nvSpPr>
+        <p:spPr>
+          <a:xfrm>
+            <a:off x="1691640" y="1783080"/>
+            <a:ext cx="10180015" cy="4663440"/>
+          </a:xfrm>
+          <a:prstGeom prst="rect">
+            <a:avLst/>
+          </a:prstGeom>
+          <a:noFill/>
+          <a:ln/>
+        </p:spPr>
+        <p:txBody>
+          <a:bodyPr wrap="square" lIns="0" tIns="0" rIns="0" bIns="0" rtlCol="0" anchor="t"/>
+          <a:lstStyle/>
+          <a:p>
+            <a:pPr algn="l" indent="0" marL="0">
+              <a:spcAft>
+                <a:spcPts val="800"/>
+              </a:spcAft>
+              <a:buNone/>
+            </a:pPr>
+            <a:r>
+              <a:rPr lang="en-US" sz="4000" b="1" dirty="0">
+                <a:solidFill>
+                  <a:srgbClr val="111111"/>
+                </a:solidFill>
+                <a:latin typeface="Times New Roman" pitchFamily="34" charset="0"/>
+                <a:ea typeface="Times New Roman" pitchFamily="34" charset="-122"/>
+                <a:cs typeface="Times New Roman" pitchFamily="34" charset="-120"/>
+              </a:rPr>
+              <a:t>Fill in the blanks:</a:t>
+            </a:r>
+            <a:endParaRPr lang="en-US" sz="4000" dirty="0"/>
+          </a:p>
+          <a:p>
+            <a:pPr algn="l" marL="342900" indent="-342900">
+              <a:spcAft>
+                <a:spcPts val="800"/>
+              </a:spcAft>
+              <a:buSzPct val="100000"/>
+              <a:buFont typeface="+mj-lt"/>
+              <a:buAutoNum type="arabicPeriod" startAt="1"/>
+            </a:pPr>
+            <a:r>
+              <a:rPr lang="en-US" sz="4000" dirty="0">
+                <a:solidFill>
+                  <a:srgbClr val="111111"/>
+                </a:solidFill>
+                <a:latin typeface="Times New Roman" pitchFamily="34" charset="0"/>
+                <a:ea typeface="Times New Roman" pitchFamily="34" charset="-122"/>
+                <a:cs typeface="Times New Roman" pitchFamily="34" charset="-120"/>
+              </a:rPr>
+              <a:t>A person who moves with his animals is a ______.</a:t>
+            </a:r>
+            <a:endParaRPr lang="en-US" sz="4000" dirty="0"/>
+          </a:p>
+          <a:p>
+            <a:pPr algn="l" marL="342900" indent="-342900">
+              <a:spcAft>
+                <a:spcPts val="800"/>
+              </a:spcAft>
+              <a:buSzPct val="100000"/>
+              <a:buFont typeface="+mj-lt"/>
+              <a:buAutoNum type="arabicPeriod" startAt="1"/>
+            </a:pPr>
+            <a:r>
+              <a:rPr lang="en-US" sz="4000" dirty="0">
+                <a:solidFill>
+                  <a:srgbClr val="111111"/>
+                </a:solidFill>
+                <a:latin typeface="Times New Roman" pitchFamily="34" charset="0"/>
+                <a:ea typeface="Times New Roman" pitchFamily="34" charset="-122"/>
+                <a:cs typeface="Times New Roman" pitchFamily="34" charset="-120"/>
+              </a:rPr>
+              <a:t>The "ship of the desert" is the ______.</a:t>
+            </a:r>
+            <a:endParaRPr lang="en-US" sz="4000" dirty="0"/>
+          </a:p>
+          <a:p>
+            <a:pPr algn="l" marL="342900" indent="-342900">
+              <a:spcAft>
+                <a:spcPts val="800"/>
+              </a:spcAft>
+              <a:buSzPct val="100000"/>
+              <a:buFont typeface="+mj-lt"/>
+              <a:buAutoNum type="arabicPeriod" startAt="1"/>
+            </a:pPr>
+            <a:r>
+              <a:rPr lang="en-US" sz="4000" dirty="0">
+                <a:solidFill>
+                  <a:srgbClr val="111111"/>
+                </a:solidFill>
+                <a:latin typeface="Times New Roman" pitchFamily="34" charset="0"/>
+                <a:ea typeface="Times New Roman" pitchFamily="34" charset="-122"/>
+                <a:cs typeface="Times New Roman" pitchFamily="34" charset="-120"/>
+              </a:rPr>
+              <a:t>Removing salt from sea water is called ______.</a:t>
+            </a:r>
+            <a:endParaRPr lang="en-US" sz="4000" dirty="0"/>
+          </a:p>
+        </p:txBody>
+      </p:sp>
+      <p:sp>
+        <p:nvSpPr>
+          <p:cNvPr id="25" name="Slide Number Placeholder 0"/>
+          <p:cNvSpPr>
+            <a:spLocks noGrp="1"/>
+          </p:cNvSpPr>
+          <p:nvPr>
+            <p:ph type="sldNum" sz="quarter" idx="4294967295"/>
+          </p:nvPr>
+        </p:nvSpPr>
+        <p:spPr>
+          <a:xfrm>
+            <a:off x="27432" y="91440"/>
+            <a:ext cx="585216" cy="475488"/>
+          </a:xfrm>
+          <a:prstGeom prst="rect">
+            <a:avLst/>
+          </a:prstGeom>
+          <a:extLst>
+            <a:ext uri="{C572A759-6A51-4108-AA02-DFA0A04FC94B}">
+              <ma14:wrappingTextBoxFlag xmlns:ma14="http://schemas.microsoft.com/office/mac/drawingml/2011/main" val="0"/>
+            </a:ext>
+          </a:extLst>
+        </p:spPr>
+        <p:txBody>
+          <a:bodyPr/>
+          <a:lstStyle>
+            <a:lvl1pPr>
+              <a:defRPr sz="2000">
+                <a:solidFill>
+                  <a:srgbClr val="FFFFFF"/>
+                </a:solidFill>
+                <a:latin typeface="Calibri"/>
+                <a:ea typeface="Calibri"/>
+                <a:cs typeface="Calibri"/>
+              </a:defRPr>
+            </a:lvl1pPr>
+          </a:lstStyle>
+          <a:p>
+            <a:pPr algn="ctr"/>
+            <a:fld id="{F7021451-1387-4CA6-816F-3879F97B5CBC}" type="slidenum">
+              <a:rPr b="1" lang="en-US"/>
+              <a:t>47</a:t>
+            </a:fld>
+            <a:endParaRPr lang="en-US"/>
+          </a:p>
+        </p:txBody>
+      </p:sp>
+    </p:spTree>
+  </p:cSld>
+  <p:clrMapOvr>
+    <a:masterClrMapping/>
+  </p:clrMapOvr>
+</p:sld>
+</file>
+
+<file path=ppt/slides/slide48.xml><?xml version="1.0" encoding="utf-8"?>
+<p:sld xmlns:a="http://schemas.openxmlformats.org/drawingml/2006/main" xmlns:r="http://schemas.openxmlformats.org/officeDocument/2006/relationships" xmlns:p="http://schemas.openxmlformats.org/presentationml/2006/main">
+  <p:cSld name="Slide 48">
+    <p:spTree>
+      <p:nvGrpSpPr>
+        <p:cNvPr id="1" name=""/>
+        <p:cNvGrpSpPr/>
+        <p:nvPr/>
+      </p:nvGrpSpPr>
+      <p:grpSpPr>
+        <a:xfrm>
+          <a:off x="0" y="0"/>
+          <a:ext cx="0" cy="0"/>
+          <a:chOff x="0" y="0"/>
+          <a:chExt cx="0" cy="0"/>
+        </a:xfrm>
+      </p:grpSpPr>
+      <p:sp>
+        <p:nvSpPr>
+          <p:cNvPr id="2" name="Text 0"/>
+          <p:cNvSpPr/>
+          <p:nvPr/>
+        </p:nvSpPr>
+        <p:spPr>
+          <a:xfrm>
+            <a:off x="457200" y="713232"/>
+            <a:ext cx="11368735" cy="274320"/>
+          </a:xfrm>
+          <a:prstGeom prst="rect">
+            <a:avLst/>
+          </a:prstGeom>
+          <a:noFill/>
+          <a:ln/>
+        </p:spPr>
+        <p:txBody>
+          <a:bodyPr wrap="square" lIns="0" tIns="0" rIns="0" bIns="0" rtlCol="0" anchor="ctr"/>
+          <a:lstStyle/>
+          <a:p>
+            <a:pPr algn="r" indent="0" marL="0">
+              <a:buNone/>
+            </a:pPr>
+            <a:r>
+              <a:rPr lang="en-US" sz="1400" b="1" dirty="0">
+                <a:solidFill>
+                  <a:srgbClr val="1C3F6E"/>
+                </a:solidFill>
+                <a:latin typeface="Calibri" pitchFamily="34" charset="0"/>
+                <a:ea typeface="Calibri" pitchFamily="34" charset="-122"/>
+                <a:cs typeface="Calibri" pitchFamily="34" charset="-120"/>
+              </a:rPr>
+              <a:t>HOMEWORK</a:t>
+            </a:r>
+            <a:endParaRPr lang="en-US" sz="1400" dirty="0"/>
+          </a:p>
+        </p:txBody>
+      </p:sp>
+      <p:pic>
+        <p:nvPicPr>
+          <p:cNvPr id="3" name="Image 0" descr="/home/claude/f4/img/minesec_sheet.png">    </p:cNvPr>
+          <p:cNvPicPr>
+            <a:picLocks noChangeAspect="1"/>
+          </p:cNvPicPr>
+          <p:nvPr/>
+        </p:nvPicPr>
+        <p:blipFill>
+          <a:blip r:embed="rId1"/>
+          <a:stretch>
+            <a:fillRect/>
+          </a:stretch>
+        </p:blipFill>
+        <p:spPr>
+          <a:xfrm>
+            <a:off x="0" y="658368"/>
+            <a:ext cx="5120640" cy="5833872"/>
+          </a:xfrm>
+          <a:prstGeom prst="rect">
+            <a:avLst/>
+          </a:prstGeom>
+        </p:spPr>
+      </p:pic>
+      <p:sp>
+        <p:nvSpPr>
+          <p:cNvPr id="4" name="Text 1"/>
+          <p:cNvSpPr/>
+          <p:nvPr/>
+        </p:nvSpPr>
+        <p:spPr>
+          <a:xfrm>
+            <a:off x="5349240" y="1005840"/>
+            <a:ext cx="6522415" cy="731520"/>
+          </a:xfrm>
+          <a:prstGeom prst="rect">
+            <a:avLst/>
+          </a:prstGeom>
+          <a:noFill/>
+          <a:ln/>
+        </p:spPr>
+        <p:txBody>
+          <a:bodyPr wrap="square" lIns="0" tIns="0" rIns="0" bIns="0" rtlCol="0" anchor="ctr">
+            <a:normAutofit/>
+          </a:bodyPr>
+          <a:lstStyle/>
+          <a:p>
+            <a:pPr algn="ctr" indent="0" marL="0">
+              <a:buNone/>
+            </a:pPr>
+            <a:r>
+              <a:rPr lang="en-US" sz="3600" b="1" dirty="0">
+                <a:solidFill>
+                  <a:srgbClr val="990011"/>
+                </a:solidFill>
+                <a:latin typeface="Times New Roman" pitchFamily="34" charset="0"/>
+                <a:ea typeface="Times New Roman" pitchFamily="34" charset="-122"/>
+                <a:cs typeface="Times New Roman" pitchFamily="34" charset="-120"/>
+              </a:rPr>
+              <a:t>Homework</a:t>
+            </a:r>
+            <a:endParaRPr lang="en-US" sz="3600" dirty="0"/>
+          </a:p>
+        </p:txBody>
+      </p:sp>
+      <p:sp>
+        <p:nvSpPr>
+          <p:cNvPr id="5" name="Text 2"/>
+          <p:cNvSpPr/>
+          <p:nvPr/>
+        </p:nvSpPr>
+        <p:spPr>
+          <a:xfrm>
+            <a:off x="5349240" y="1783080"/>
+            <a:ext cx="6522415" cy="4663440"/>
+          </a:xfrm>
+          <a:prstGeom prst="rect">
+            <a:avLst/>
+          </a:prstGeom>
+          <a:noFill/>
+          <a:ln/>
+        </p:spPr>
+        <p:txBody>
+          <a:bodyPr wrap="square" lIns="0" tIns="0" rIns="0" bIns="0" rtlCol="0" anchor="t"/>
+          <a:lstStyle/>
+          <a:p>
+            <a:pPr algn="l" indent="0" marL="0">
+              <a:spcAft>
+                <a:spcPts val="800"/>
+              </a:spcAft>
+              <a:buNone/>
+            </a:pPr>
+            <a:r>
+              <a:rPr lang="en-US" sz="4000" dirty="0">
+                <a:solidFill>
+                  <a:srgbClr val="111111"/>
+                </a:solidFill>
+                <a:latin typeface="Times New Roman" pitchFamily="34" charset="0"/>
+                <a:ea typeface="Times New Roman" pitchFamily="34" charset="-122"/>
+                <a:cs typeface="Times New Roman" pitchFamily="34" charset="-120"/>
+              </a:rPr>
+              <a:t>Find in your textbook or atlas the name of one oasis in the Sahara, and write the name of the country where it is found.</a:t>
+            </a:r>
+            <a:endParaRPr lang="en-US" sz="4000" dirty="0"/>
+          </a:p>
+        </p:txBody>
+      </p:sp>
+      <p:sp>
+        <p:nvSpPr>
+          <p:cNvPr id="25" name="Slide Number Placeholder 0"/>
+          <p:cNvSpPr>
+            <a:spLocks noGrp="1"/>
+          </p:cNvSpPr>
+          <p:nvPr>
+            <p:ph type="sldNum" sz="quarter" idx="4294967295"/>
+          </p:nvPr>
+        </p:nvSpPr>
+        <p:spPr>
+          <a:xfrm>
+            <a:off x="27432" y="91440"/>
+            <a:ext cx="585216" cy="475488"/>
+          </a:xfrm>
+          <a:prstGeom prst="rect">
+            <a:avLst/>
+          </a:prstGeom>
+          <a:extLst>
+            <a:ext uri="{C572A759-6A51-4108-AA02-DFA0A04FC94B}">
+              <ma14:wrappingTextBoxFlag xmlns:ma14="http://schemas.microsoft.com/office/mac/drawingml/2011/main" val="0"/>
+            </a:ext>
+          </a:extLst>
+        </p:spPr>
+        <p:txBody>
+          <a:bodyPr/>
+          <a:lstStyle>
+            <a:lvl1pPr>
+              <a:defRPr sz="2000">
+                <a:solidFill>
+                  <a:srgbClr val="FFFFFF"/>
+                </a:solidFill>
+                <a:latin typeface="Calibri"/>
+                <a:ea typeface="Calibri"/>
+                <a:cs typeface="Calibri"/>
+              </a:defRPr>
+            </a:lvl1pPr>
+          </a:lstStyle>
+          <a:p>
+            <a:pPr algn="ctr"/>
+            <a:fld id="{F7021451-1387-4CA6-816F-3879F97B5CBC}" type="slidenum">
+              <a:rPr b="1" lang="en-US"/>
+              <a:t>48</a:t>
+            </a:fld>
+            <a:endParaRPr lang="en-US"/>
+          </a:p>
+        </p:txBody>
+      </p:sp>
+    </p:spTree>
+  </p:cSld>
+  <p:clrMapOvr>
+    <a:masterClrMapping/>
+  </p:clrMapOvr>
+</p:sld>
+</file>
+
+<file path=ppt/slides/slide49.xml><?xml version="1.0" encoding="utf-8"?>
+<p:sld xmlns:a="http://schemas.openxmlformats.org/drawingml/2006/main" xmlns:r="http://schemas.openxmlformats.org/officeDocument/2006/relationships" xmlns:p="http://schemas.openxmlformats.org/presentationml/2006/main">
+  <p:cSld name="Slide 49">
+    <p:spTree>
+      <p:nvGrpSpPr>
+        <p:cNvPr id="1" name=""/>
+        <p:cNvGrpSpPr/>
+        <p:nvPr/>
+      </p:nvGrpSpPr>
+      <p:grpSpPr>
+        <a:xfrm>
+          <a:off x="0" y="0"/>
+          <a:ext cx="0" cy="0"/>
+          <a:chOff x="0" y="0"/>
+          <a:chExt cx="0" cy="0"/>
+        </a:xfrm>
+      </p:grpSpPr>
+      <p:sp>
+        <p:nvSpPr>
+          <p:cNvPr id="2" name="Text 0"/>
+          <p:cNvSpPr/>
+          <p:nvPr/>
+        </p:nvSpPr>
+        <p:spPr>
+          <a:xfrm>
+            <a:off x="457200" y="713232"/>
+            <a:ext cx="11368735" cy="274320"/>
+          </a:xfrm>
+          <a:prstGeom prst="rect">
+            <a:avLst/>
+          </a:prstGeom>
+          <a:noFill/>
+          <a:ln/>
+        </p:spPr>
+        <p:txBody>
+          <a:bodyPr wrap="square" lIns="0" tIns="0" rIns="0" bIns="0" rtlCol="0" anchor="ctr"/>
+          <a:lstStyle/>
+          <a:p>
+            <a:pPr algn="r" indent="0" marL="0">
+              <a:buNone/>
+            </a:pPr>
+            <a:r>
+              <a:rPr lang="en-US" sz="1400" b="1" dirty="0">
+                <a:solidFill>
+                  <a:srgbClr val="1C3F6E"/>
+                </a:solidFill>
+                <a:latin typeface="Calibri" pitchFamily="34" charset="0"/>
+                <a:ea typeface="Calibri" pitchFamily="34" charset="-122"/>
+                <a:cs typeface="Calibri" pitchFamily="34" charset="-120"/>
+              </a:rPr>
+              <a:t>NEXT LESSON</a:t>
+            </a:r>
+            <a:endParaRPr lang="en-US" sz="1400" dirty="0"/>
+          </a:p>
+        </p:txBody>
+      </p:sp>
+      <p:pic>
+        <p:nvPicPr>
+          <p:cNvPr id="3" name="Image 0" descr="/home/claude/f4/img/minesec_sheet.png">    </p:cNvPr>
+          <p:cNvPicPr>
+            <a:picLocks noChangeAspect="1"/>
+          </p:cNvPicPr>
+          <p:nvPr/>
+        </p:nvPicPr>
+        <p:blipFill>
+          <a:blip r:embed="rId1"/>
+          <a:stretch>
+            <a:fillRect/>
+          </a:stretch>
+        </p:blipFill>
+        <p:spPr>
+          <a:xfrm>
+            <a:off x="0" y="658368"/>
+            <a:ext cx="5120640" cy="5833872"/>
+          </a:xfrm>
+          <a:prstGeom prst="rect">
+            <a:avLst/>
+          </a:prstGeom>
+        </p:spPr>
+      </p:pic>
+      <p:sp>
+        <p:nvSpPr>
+          <p:cNvPr id="4" name="Text 1"/>
+          <p:cNvSpPr/>
+          <p:nvPr/>
+        </p:nvSpPr>
+        <p:spPr>
+          <a:xfrm>
+            <a:off x="5349240" y="1005840"/>
+            <a:ext cx="6522415" cy="731520"/>
+          </a:xfrm>
+          <a:prstGeom prst="rect">
+            <a:avLst/>
+          </a:prstGeom>
+          <a:noFill/>
+          <a:ln/>
+        </p:spPr>
+        <p:txBody>
+          <a:bodyPr wrap="square" lIns="0" tIns="0" rIns="0" bIns="0" rtlCol="0" anchor="ctr">
+            <a:normAutofit/>
+          </a:bodyPr>
+          <a:lstStyle/>
+          <a:p>
+            <a:pPr algn="ctr" indent="0" marL="0">
+              <a:buNone/>
+            </a:pPr>
+            <a:r>
+              <a:rPr lang="en-US" sz="3600" b="1" dirty="0">
+                <a:solidFill>
+                  <a:srgbClr val="990011"/>
+                </a:solidFill>
+                <a:latin typeface="Times New Roman" pitchFamily="34" charset="0"/>
+                <a:ea typeface="Times New Roman" pitchFamily="34" charset="-122"/>
+                <a:cs typeface="Times New Roman" pitchFamily="34" charset="-120"/>
+              </a:rPr>
+              <a:t>Next Lesson</a:t>
+            </a:r>
+            <a:endParaRPr lang="en-US" sz="3600" dirty="0"/>
+          </a:p>
+        </p:txBody>
+      </p:sp>
+      <p:sp>
+        <p:nvSpPr>
+          <p:cNvPr id="5" name="Text 2"/>
+          <p:cNvSpPr/>
+          <p:nvPr/>
+        </p:nvSpPr>
+        <p:spPr>
+          <a:xfrm>
+            <a:off x="5349240" y="1783080"/>
+            <a:ext cx="6522415" cy="4663440"/>
+          </a:xfrm>
+          <a:prstGeom prst="rect">
+            <a:avLst/>
+          </a:prstGeom>
+          <a:noFill/>
+          <a:ln/>
+        </p:spPr>
+        <p:txBody>
+          <a:bodyPr wrap="square" lIns="0" tIns="0" rIns="0" bIns="0" rtlCol="0" anchor="ctr"/>
+          <a:lstStyle/>
+          <a:p>
+            <a:pPr algn="ctr" indent="0" marL="0">
+              <a:spcAft>
+                <a:spcPts val="800"/>
+              </a:spcAft>
+              <a:buNone/>
+            </a:pPr>
+            <a:r>
+              <a:rPr lang="en-US" sz="4000" b="1" dirty="0">
+                <a:solidFill>
+                  <a:srgbClr val="111111"/>
+                </a:solidFill>
+                <a:latin typeface="Times New Roman" pitchFamily="34" charset="0"/>
+                <a:ea typeface="Times New Roman" pitchFamily="34" charset="-122"/>
+                <a:cs typeface="Times New Roman" pitchFamily="34" charset="-120"/>
+              </a:rPr>
+              <a:t>Our next lesson will be on:</a:t>
+            </a:r>
+            <a:endParaRPr lang="en-US" sz="4000" dirty="0"/>
+          </a:p>
+          <a:p>
+            <a:pPr algn="ctr" indent="0" marL="0">
+              <a:spcAft>
+                <a:spcPts val="800"/>
+              </a:spcAft>
+              <a:buNone/>
+            </a:pPr>
+            <a:r>
+              <a:rPr lang="en-US" sz="4000" b="1" dirty="0">
+                <a:solidFill>
+                  <a:srgbClr val="990011"/>
+                </a:solidFill>
+                <a:latin typeface="Times New Roman" pitchFamily="34" charset="0"/>
+                <a:ea typeface="Times New Roman" pitchFamily="34" charset="-122"/>
+                <a:cs typeface="Times New Roman" pitchFamily="34" charset="-120"/>
+              </a:rPr>
+              <a:t>Lesson 3 (Part 5): The Desert Regions: Human Activities (Farming around Oases)</a:t>
+            </a:r>
+            <a:endParaRPr lang="en-US" sz="4000" dirty="0"/>
+          </a:p>
+        </p:txBody>
+      </p:sp>
+      <p:sp>
+        <p:nvSpPr>
+          <p:cNvPr id="25" name="Slide Number Placeholder 0"/>
+          <p:cNvSpPr>
+            <a:spLocks noGrp="1"/>
+          </p:cNvSpPr>
+          <p:nvPr>
+            <p:ph type="sldNum" sz="quarter" idx="4294967295"/>
+          </p:nvPr>
+        </p:nvSpPr>
+        <p:spPr>
+          <a:xfrm>
+            <a:off x="27432" y="91440"/>
+            <a:ext cx="585216" cy="475488"/>
+          </a:xfrm>
+          <a:prstGeom prst="rect">
+            <a:avLst/>
+          </a:prstGeom>
+          <a:extLst>
+            <a:ext uri="{C572A759-6A51-4108-AA02-DFA0A04FC94B}">
+              <ma14:wrappingTextBoxFlag xmlns:ma14="http://schemas.microsoft.com/office/mac/drawingml/2011/main" val="0"/>
+            </a:ext>
+          </a:extLst>
+        </p:spPr>
+        <p:txBody>
+          <a:bodyPr/>
+          <a:lstStyle>
+            <a:lvl1pPr>
+              <a:defRPr sz="2000">
+                <a:solidFill>
+                  <a:srgbClr val="FFFFFF"/>
+                </a:solidFill>
+                <a:latin typeface="Calibri"/>
+                <a:ea typeface="Calibri"/>
+                <a:cs typeface="Calibri"/>
+              </a:defRPr>
+            </a:lvl1pPr>
+          </a:lstStyle>
+          <a:p>
+            <a:pPr algn="ctr"/>
+            <a:fld id="{F7021451-1387-4CA6-816F-3879F97B5CBC}" type="slidenum">
+              <a:rPr b="1" lang="en-US"/>
+              <a:t>49</a:t>
+            </a:fld>
+            <a:endParaRPr lang="en-US"/>
+          </a:p>
+        </p:txBody>
+      </p:sp>
+    </p:spTree>
+  </p:cSld>
+  <p:clrMapOvr>
+    <a:masterClrMapping/>
+  </p:clrMapOvr>
+</p:sld>
+</file>
+
+<file path=ppt/slides/slide5.xml><?xml version="1.0" encoding="utf-8"?>
+<p:sld xmlns:a="http://schemas.openxmlformats.org/drawingml/2006/main" xmlns:r="http://schemas.openxmlformats.org/officeDocument/2006/relationships" xmlns:p="http://schemas.openxmlformats.org/presentationml/2006/main">
+  <p:cSld name="Slide 5">
+    <p:spTree>
+      <p:nvGrpSpPr>
+        <p:cNvPr id="1" name=""/>
+        <p:cNvGrpSpPr/>
+        <p:nvPr/>
+      </p:nvGrpSpPr>
+      <p:grpSpPr>
+        <a:xfrm>
+          <a:off x="0" y="0"/>
+          <a:ext cx="0" cy="0"/>
+          <a:chOff x="0" y="0"/>
+          <a:chExt cx="0" cy="0"/>
+        </a:xfrm>
+      </p:grpSpPr>
+      <p:sp>
+        <p:nvSpPr>
+          <p:cNvPr id="2" name="Text 0"/>
+          <p:cNvSpPr/>
+          <p:nvPr/>
+        </p:nvSpPr>
+        <p:spPr>
+          <a:xfrm>
+            <a:off x="457200" y="713232"/>
+            <a:ext cx="11368735" cy="274320"/>
+          </a:xfrm>
+          <a:prstGeom prst="rect">
+            <a:avLst/>
+          </a:prstGeom>
+          <a:noFill/>
+          <a:ln/>
+        </p:spPr>
+        <p:txBody>
+          <a:bodyPr wrap="square" lIns="0" tIns="0" rIns="0" bIns="0" rtlCol="0" anchor="ctr"/>
+          <a:lstStyle/>
+          <a:p>
+            <a:pPr algn="r" indent="0" marL="0">
+              <a:buNone/>
+            </a:pPr>
+            <a:r>
+              <a:rPr lang="en-US" sz="1400" b="1" dirty="0">
+                <a:solidFill>
+                  <a:srgbClr val="1C3F6E"/>
+                </a:solidFill>
+                <a:latin typeface="Calibri" pitchFamily="34" charset="0"/>
+                <a:ea typeface="Calibri" pitchFamily="34" charset="-122"/>
+                <a:cs typeface="Calibri" pitchFamily="34" charset="-120"/>
+              </a:rPr>
+              <a:t>HOMEWORK CORRECTION</a:t>
+            </a:r>
+            <a:endParaRPr lang="en-US" sz="1400" dirty="0"/>
+          </a:p>
+        </p:txBody>
+      </p:sp>
+      <p:pic>
+        <p:nvPicPr>
+          <p:cNvPr id="3" name="Image 0" descr="/home/claude/f4/img/minesec_sheet.png">    </p:cNvPr>
+          <p:cNvPicPr>
+            <a:picLocks noChangeAspect="1"/>
+          </p:cNvPicPr>
+          <p:nvPr/>
+        </p:nvPicPr>
+        <p:blipFill>
+          <a:blip r:embed="rId1"/>
+          <a:stretch>
+            <a:fillRect/>
+          </a:stretch>
+        </p:blipFill>
+        <p:spPr>
+          <a:xfrm>
+            <a:off x="0" y="658368"/>
+            <a:ext cx="5120640" cy="5833872"/>
+          </a:xfrm>
+          <a:prstGeom prst="rect">
+            <a:avLst/>
+          </a:prstGeom>
+        </p:spPr>
+      </p:pic>
+      <p:sp>
+        <p:nvSpPr>
+          <p:cNvPr id="4" name="Text 1"/>
+          <p:cNvSpPr/>
+          <p:nvPr/>
+        </p:nvSpPr>
+        <p:spPr>
+          <a:xfrm>
+            <a:off x="5349240" y="1005840"/>
+            <a:ext cx="6522415" cy="731520"/>
+          </a:xfrm>
+          <a:prstGeom prst="rect">
+            <a:avLst/>
+          </a:prstGeom>
+          <a:noFill/>
+          <a:ln/>
+        </p:spPr>
+        <p:txBody>
+          <a:bodyPr wrap="square" lIns="0" tIns="0" rIns="0" bIns="0" rtlCol="0" anchor="ctr">
+            <a:normAutofit/>
+          </a:bodyPr>
+          <a:lstStyle/>
+          <a:p>
+            <a:pPr algn="ctr" indent="0" marL="0">
+              <a:buNone/>
+            </a:pPr>
+            <a:r>
+              <a:rPr lang="en-US" sz="3600" b="1" dirty="0">
+                <a:solidFill>
+                  <a:srgbClr val="990011"/>
+                </a:solidFill>
+                <a:latin typeface="Times New Roman" pitchFamily="34" charset="0"/>
+                <a:ea typeface="Times New Roman" pitchFamily="34" charset="-122"/>
+                <a:cs typeface="Times New Roman" pitchFamily="34" charset="-120"/>
+              </a:rPr>
+              <a:t>Correction: Possible Answer</a:t>
+            </a:r>
+            <a:endParaRPr lang="en-US" sz="3600" dirty="0"/>
+          </a:p>
+        </p:txBody>
+      </p:sp>
+      <p:sp>
+        <p:nvSpPr>
+          <p:cNvPr id="5" name="Text 2"/>
+          <p:cNvSpPr/>
+          <p:nvPr/>
+        </p:nvSpPr>
+        <p:spPr>
+          <a:xfrm>
+            <a:off x="5349240" y="1783080"/>
+            <a:ext cx="6522415" cy="4663440"/>
+          </a:xfrm>
+          <a:prstGeom prst="rect">
+            <a:avLst/>
+          </a:prstGeom>
+          <a:noFill/>
+          <a:ln/>
+        </p:spPr>
+        <p:txBody>
+          <a:bodyPr wrap="square" lIns="0" tIns="0" rIns="0" bIns="0" rtlCol="0" anchor="t"/>
+          <a:lstStyle/>
+          <a:p>
+            <a:pPr algn="l" indent="0" marL="0">
+              <a:spcAft>
+                <a:spcPts val="800"/>
+              </a:spcAft>
+              <a:buNone/>
+            </a:pPr>
+            <a:r>
+              <a:rPr lang="en-US" sz="4000" dirty="0">
+                <a:solidFill>
+                  <a:srgbClr val="111111"/>
+                </a:solidFill>
+                <a:latin typeface="Times New Roman" pitchFamily="34" charset="0"/>
+                <a:ea typeface="Times New Roman" pitchFamily="34" charset="-122"/>
+                <a:cs typeface="Times New Roman" pitchFamily="34" charset="-120"/>
+              </a:rPr>
+              <a:t>Examples: lack of water (carry water and drink often); heat by day and cold at night (wear loose clothes by day and warm clothes at night); sandstorms (cover the face and shelter).</a:t>
+            </a:r>
+            <a:endParaRPr lang="en-US" sz="4000" dirty="0"/>
+          </a:p>
+        </p:txBody>
+      </p:sp>
+      <p:sp>
+        <p:nvSpPr>
+          <p:cNvPr id="25" name="Slide Number Placeholder 0"/>
+          <p:cNvSpPr>
+            <a:spLocks noGrp="1"/>
+          </p:cNvSpPr>
+          <p:nvPr>
+            <p:ph type="sldNum" sz="quarter" idx="4294967295"/>
+          </p:nvPr>
+        </p:nvSpPr>
+        <p:spPr>
+          <a:xfrm>
+            <a:off x="27432" y="91440"/>
+            <a:ext cx="585216" cy="475488"/>
+          </a:xfrm>
+          <a:prstGeom prst="rect">
+            <a:avLst/>
+          </a:prstGeom>
+          <a:extLst>
+            <a:ext uri="{C572A759-6A51-4108-AA02-DFA0A04FC94B}">
+              <ma14:wrappingTextBoxFlag xmlns:ma14="http://schemas.microsoft.com/office/mac/drawingml/2011/main" val="0"/>
+            </a:ext>
+          </a:extLst>
+        </p:spPr>
+        <p:txBody>
+          <a:bodyPr/>
+          <a:lstStyle>
+            <a:lvl1pPr>
+              <a:defRPr sz="2000">
+                <a:solidFill>
+                  <a:srgbClr val="FFFFFF"/>
+                </a:solidFill>
+                <a:latin typeface="Calibri"/>
+                <a:ea typeface="Calibri"/>
+                <a:cs typeface="Calibri"/>
+              </a:defRPr>
+            </a:lvl1pPr>
+          </a:lstStyle>
+          <a:p>
+            <a:pPr algn="ctr"/>
+            <a:fld id="{F7021451-1387-4CA6-816F-3879F97B5CBC}" type="slidenum">
+              <a:rPr b="1" lang="en-US"/>
+              <a:t>5</a:t>
+            </a:fld>
+            <a:endParaRPr lang="en-US"/>
+          </a:p>
+        </p:txBody>
+      </p:sp>
+    </p:spTree>
+  </p:cSld>
+  <p:clrMapOvr>
+    <a:masterClrMapping/>
+  </p:clrMapOvr>
+</p:sld>
+</file>
+
+<file path=ppt/slides/slide50.xml><?xml version="1.0" encoding="utf-8"?>
+<p:sld xmlns:a="http://schemas.openxmlformats.org/drawingml/2006/main" xmlns:r="http://schemas.openxmlformats.org/officeDocument/2006/relationships" xmlns:p="http://schemas.openxmlformats.org/presentationml/2006/main">
+  <p:cSld name="Slide 50">
+    <p:spTree>
+      <p:nvGrpSpPr>
+        <p:cNvPr id="1" name=""/>
+        <p:cNvGrpSpPr/>
+        <p:nvPr/>
+      </p:nvGrpSpPr>
+      <p:grpSpPr>
+        <a:xfrm>
+          <a:off x="0" y="0"/>
+          <a:ext cx="0" cy="0"/>
+          <a:chOff x="0" y="0"/>
+          <a:chExt cx="0" cy="0"/>
+        </a:xfrm>
+      </p:grpSpPr>
+      <p:sp>
+        <p:nvSpPr>
+          <p:cNvPr id="2" name="Text 0"/>
+          <p:cNvSpPr/>
+          <p:nvPr/>
+        </p:nvSpPr>
+        <p:spPr>
+          <a:xfrm>
+            <a:off x="457200" y="713232"/>
+            <a:ext cx="11368735" cy="274320"/>
+          </a:xfrm>
+          <a:prstGeom prst="rect">
+            <a:avLst/>
+          </a:prstGeom>
+          <a:noFill/>
+          <a:ln/>
+        </p:spPr>
+        <p:txBody>
+          <a:bodyPr wrap="square" lIns="0" tIns="0" rIns="0" bIns="0" rtlCol="0" anchor="ctr"/>
+          <a:lstStyle/>
+          <a:p>
+            <a:pPr algn="r" indent="0" marL="0">
+              <a:buNone/>
+            </a:pPr>
+            <a:r>
+              <a:rPr lang="en-US" sz="1400" b="1" dirty="0">
+                <a:solidFill>
+                  <a:srgbClr val="1C3F6E"/>
+                </a:solidFill>
+                <a:latin typeface="Calibri" pitchFamily="34" charset="0"/>
+                <a:ea typeface="Calibri" pitchFamily="34" charset="-122"/>
+                <a:cs typeface="Calibri" pitchFamily="34" charset="-120"/>
+              </a:rPr>
               <a:t>BILINGUAL GAME</a:t>
             </a:r>
             <a:endParaRPr lang="en-US" sz="1400" dirty="0"/>
@@ -16822,7 +18159,7 @@
       </p:sp>
       <p:graphicFrame>
         <p:nvGraphicFramePr>
-          <p:cNvPr id="48" name="Table 0"/>
+          <p:cNvPr id="51" name="Table 0"/>
           <p:cNvGraphicFramePr>
             <a:graphicFrameLocks noGrp="1"/>
           </p:cNvGraphicFramePr>
@@ -18134,7 +19471,7 @@
             <a:pPr algn="ctr"/>
             <a:fld id="{F7021451-1387-4CA6-816F-3879F97B5CBC}" type="slidenum">
               <a:rPr b="1" lang="en-US"/>
-              <a:t>47</a:t>
+              <a:t>50</a:t>
             </a:fld>
             <a:endParaRPr lang="en-US"/>
           </a:p>
@@ -18148,9 +19485,9 @@
 </p:sld>
 </file>
 
-<file path=ppt/slides/slide48.xml><?xml version="1.0" encoding="utf-8"?>
+<file path=ppt/slides/slide51.xml><?xml version="1.0" encoding="utf-8"?>
 <p:sld xmlns:a="http://schemas.openxmlformats.org/drawingml/2006/main" xmlns:r="http://schemas.openxmlformats.org/officeDocument/2006/relationships" xmlns:p="http://schemas.openxmlformats.org/presentationml/2006/main">
-  <p:cSld name="Slide 48">
+  <p:cSld name="Slide 51">
     <p:spTree>
       <p:nvGrpSpPr>
         <p:cNvPr id="1" name=""/>
@@ -18245,7 +19582,7 @@
       </p:sp>
       <p:graphicFrame>
         <p:nvGraphicFramePr>
-          <p:cNvPr id="49" name="Table 0"/>
+          <p:cNvPr id="52" name="Table 0"/>
           <p:cNvGraphicFramePr>
             <a:graphicFrameLocks noGrp="1"/>
           </p:cNvGraphicFramePr>
@@ -18867,7 +20204,7 @@
             <a:pPr algn="ctr"/>
             <a:fld id="{F7021451-1387-4CA6-816F-3879F97B5CBC}" type="slidenum">
               <a:rPr b="1" lang="en-US"/>
-              <a:t>48</a:t>
+              <a:t>51</a:t>
             </a:fld>
             <a:endParaRPr lang="en-US"/>
           </a:p>
@@ -18881,9 +20218,9 @@
 </p:sld>
 </file>
 
-<file path=ppt/slides/slide49.xml><?xml version="1.0" encoding="utf-8"?>
+<file path=ppt/slides/slide52.xml><?xml version="1.0" encoding="utf-8"?>
 <p:sld xmlns:a="http://schemas.openxmlformats.org/drawingml/2006/main" xmlns:r="http://schemas.openxmlformats.org/officeDocument/2006/relationships" xmlns:p="http://schemas.openxmlformats.org/presentationml/2006/main">
-  <p:cSld name="Slide 49">
+  <p:cSld name="Slide 52">
     <p:spTree>
       <p:nvGrpSpPr>
         <p:cNvPr id="1" name=""/>
@@ -18978,7 +20315,7 @@
       </p:sp>
       <p:graphicFrame>
         <p:nvGraphicFramePr>
-          <p:cNvPr id="50" name="Table 0"/>
+          <p:cNvPr id="53" name="Table 0"/>
           <p:cNvGraphicFramePr>
             <a:graphicFrameLocks noGrp="1"/>
           </p:cNvGraphicFramePr>
@@ -19738,7 +21075,7 @@
             <a:pPr algn="ctr"/>
             <a:fld id="{F7021451-1387-4CA6-816F-3879F97B5CBC}" type="slidenum">
               <a:rPr b="1" lang="en-US"/>
-              <a:t>49</a:t>
+              <a:t>52</a:t>
             </a:fld>
             <a:endParaRPr lang="en-US"/>
           </a:p>
@@ -19752,9 +21089,9 @@
 </p:sld>
 </file>
 
-<file path=ppt/slides/slide5.xml><?xml version="1.0" encoding="utf-8"?>
+<file path=ppt/slides/slide53.xml><?xml version="1.0" encoding="utf-8"?>
 <p:sld xmlns:a="http://schemas.openxmlformats.org/drawingml/2006/main" xmlns:r="http://schemas.openxmlformats.org/officeDocument/2006/relationships" xmlns:p="http://schemas.openxmlformats.org/presentationml/2006/main">
-  <p:cSld name="Slide 5">
+  <p:cSld name="Slide 53">
     <p:spTree>
       <p:nvGrpSpPr>
         <p:cNvPr id="1" name=""/>
@@ -19802,7 +21139,7 @@
                 <a:ea typeface="Calibri" pitchFamily="34" charset="-122"/>
                 <a:cs typeface="Calibri" pitchFamily="34" charset="-120"/>
               </a:rPr>
-              <a:t>HOMEWORK CORRECTION</a:t>
+              <a:t>TEACHER'S NOTE</a:t>
             </a:r>
             <a:endParaRPr lang="en-US" sz="1400" dirty="0"/>
           </a:p>
@@ -19825,7 +21162,7 @@
         <p:spPr>
           <a:xfrm>
             <a:off x="0" y="658368"/>
-            <a:ext cx="5120640" cy="5833872"/>
+            <a:ext cx="3840480" cy="5833872"/>
           </a:xfrm>
           <a:prstGeom prst="rect">
             <a:avLst/>
@@ -19840,8 +21177,8 @@
         </p:nvSpPr>
         <p:spPr>
           <a:xfrm>
-            <a:off x="5349240" y="1005840"/>
-            <a:ext cx="6522415" cy="731520"/>
+            <a:off x="4069080" y="1005840"/>
+            <a:ext cx="7802575" cy="731520"/>
           </a:xfrm>
           <a:prstGeom prst="rect">
             <a:avLst/>
@@ -19867,7 +21204,7 @@
                 <a:ea typeface="Times New Roman" pitchFamily="34" charset="-122"/>
                 <a:cs typeface="Times New Roman" pitchFamily="34" charset="-120"/>
               </a:rPr>
-              <a:t>Correction: Possible Answer</a:t>
+              <a:t>Teacher's Note</a:t>
             </a:r>
             <a:endParaRPr lang="en-US" sz="3600" dirty="0"/>
           </a:p>
@@ -19881,8 +21218,8 @@
         </p:nvSpPr>
         <p:spPr>
           <a:xfrm>
-            <a:off x="5349240" y="1783080"/>
-            <a:ext cx="6522415" cy="4663440"/>
+            <a:off x="4069080" y="1783080"/>
+            <a:ext cx="7802575" cy="4663440"/>
           </a:xfrm>
           <a:prstGeom prst="rect">
             <a:avLst/>
@@ -19894,24 +21231,130 @@
           <a:bodyPr wrap="square" lIns="0" tIns="0" rIns="0" bIns="0" rtlCol="0" anchor="t"/>
           <a:lstStyle/>
           <a:p>
-            <a:pPr algn="l" indent="0" marL="0">
+            <a:pPr algn="l" marL="342900" indent="-342900">
               <a:spcAft>
                 <a:spcPts val="800"/>
               </a:spcAft>
-              <a:buNone/>
+              <a:buSzPct val="100000"/>
+              <a:buChar char="•"/>
             </a:pPr>
             <a:r>
-              <a:rPr lang="en-US" sz="4000" dirty="0">
+              <a:rPr lang="en-US" sz="2000" dirty="0">
                 <a:solidFill>
                   <a:srgbClr val="111111"/>
                 </a:solidFill>
-                <a:latin typeface="Times New Roman" pitchFamily="34" charset="0"/>
-                <a:ea typeface="Times New Roman" pitchFamily="34" charset="-122"/>
-                <a:cs typeface="Times New Roman" pitchFamily="34" charset="-120"/>
+                <a:latin typeface="Calibri" pitchFamily="34" charset="0"/>
+                <a:ea typeface="Calibri" pitchFamily="34" charset="-122"/>
+                <a:cs typeface="Calibri" pitchFamily="34" charset="-120"/>
               </a:rPr>
-              <a:t>Examples: lack of water (carry water and drink often); heat by day and cold at night (wear loose clothes by day and warm clothes at night); sandstorms (cover the face and shelter).</a:t>
-            </a:r>
-            <a:endParaRPr lang="en-US" sz="4000" dirty="0"/>
+              <a:t>Timing: Homework correction, plan, objectives 8 min | Recall, situation, action 10 min | 5 activities 30 min | Board summary (copying) 30 min | Evaluation, remediation 10 min | Homework, next lesson 5 min | Logbook 7 min</a:t>
+            </a:r>
+            <a:endParaRPr lang="en-US" sz="2000" dirty="0"/>
+          </a:p>
+          <a:p>
+            <a:pPr algn="l" marL="342900" indent="-342900">
+              <a:spcAft>
+                <a:spcPts val="800"/>
+              </a:spcAft>
+              <a:buSzPct val="100000"/>
+              <a:buChar char="•"/>
+            </a:pPr>
+            <a:r>
+              <a:rPr lang="en-US" sz="2000" dirty="0">
+                <a:solidFill>
+                  <a:srgbClr val="111111"/>
+                </a:solidFill>
+                <a:latin typeface="Calibri" pitchFamily="34" charset="0"/>
+                <a:ea typeface="Calibri" pitchFamily="34" charset="-122"/>
+                <a:cs typeface="Calibri" pitchFamily="34" charset="-120"/>
+              </a:rPr>
+              <a:t>Without the projector (Activity 1): describe a dry well.</a:t>
+            </a:r>
+            <a:endParaRPr lang="en-US" sz="2000" dirty="0"/>
+          </a:p>
+          <a:p>
+            <a:pPr algn="l" marL="342900" indent="-342900">
+              <a:spcAft>
+                <a:spcPts val="800"/>
+              </a:spcAft>
+              <a:buSzPct val="100000"/>
+              <a:buChar char="•"/>
+            </a:pPr>
+            <a:r>
+              <a:rPr lang="en-US" sz="2000" dirty="0">
+                <a:solidFill>
+                  <a:srgbClr val="111111"/>
+                </a:solidFill>
+                <a:latin typeface="Calibri" pitchFamily="34" charset="0"/>
+                <a:ea typeface="Calibri" pitchFamily="34" charset="-122"/>
+                <a:cs typeface="Calibri" pitchFamily="34" charset="-120"/>
+              </a:rPr>
+              <a:t>Without the projector (Activity 2): describe sand after a windy day.</a:t>
+            </a:r>
+            <a:endParaRPr lang="en-US" sz="2000" dirty="0"/>
+          </a:p>
+          <a:p>
+            <a:pPr algn="l" marL="342900" indent="-342900">
+              <a:spcAft>
+                <a:spcPts val="800"/>
+              </a:spcAft>
+              <a:buSzPct val="100000"/>
+              <a:buChar char="•"/>
+            </a:pPr>
+            <a:r>
+              <a:rPr lang="en-US" sz="2000" dirty="0">
+                <a:solidFill>
+                  <a:srgbClr val="111111"/>
+                </a:solidFill>
+                <a:latin typeface="Calibri" pitchFamily="34" charset="0"/>
+                <a:ea typeface="Calibri" pitchFamily="34" charset="-122"/>
+                <a:cs typeface="Calibri" pitchFamily="34" charset="-120"/>
+              </a:rPr>
+              <a:t>Without the projector (Activity 3): describe a camel.</a:t>
+            </a:r>
+            <a:endParaRPr lang="en-US" sz="2000" dirty="0"/>
+          </a:p>
+          <a:p>
+            <a:pPr algn="l" marL="342900" indent="-342900">
+              <a:spcAft>
+                <a:spcPts val="800"/>
+              </a:spcAft>
+              <a:buSzPct val="100000"/>
+              <a:buChar char="•"/>
+            </a:pPr>
+            <a:r>
+              <a:rPr lang="en-US" sz="2000" dirty="0">
+                <a:solidFill>
+                  <a:srgbClr val="111111"/>
+                </a:solidFill>
+                <a:latin typeface="Calibri" pitchFamily="34" charset="0"/>
+                <a:ea typeface="Calibri" pitchFamily="34" charset="-122"/>
+                <a:cs typeface="Calibri" pitchFamily="34" charset="-120"/>
+              </a:rPr>
+              <a:t>Without the projector (Activity 4): describe the clothes of herders in the North.</a:t>
+            </a:r>
+            <a:endParaRPr lang="en-US" sz="2000" dirty="0"/>
+          </a:p>
+          <a:p>
+            <a:pPr algn="l" marL="342900" indent="-342900">
+              <a:spcAft>
+                <a:spcPts val="800"/>
+              </a:spcAft>
+              <a:buSzPct val="100000"/>
+              <a:buChar char="•"/>
+            </a:pPr>
+            <a:r>
+              <a:rPr lang="en-US" sz="2000" dirty="0">
+                <a:solidFill>
+                  <a:srgbClr val="111111"/>
+                </a:solidFill>
+                <a:latin typeface="Calibri" pitchFamily="34" charset="0"/>
+                <a:ea typeface="Calibri" pitchFamily="34" charset="-122"/>
+                <a:cs typeface="Calibri" pitchFamily="34" charset="-120"/>
+              </a:rPr>
+              <a:t>Without the projector (Activity 5): taste salty water.</a:t>
+            </a:r>
+            <a:endParaRPr lang="en-US" sz="2000" dirty="0"/>
           </a:p>
         </p:txBody>
       </p:sp>
@@ -19957,7 +21400,7 @@
             <a:pPr algn="ctr"/>
             <a:fld id="{F7021451-1387-4CA6-816F-3879F97B5CBC}" type="slidenum">
               <a:rPr b="1" lang="en-US"/>
-              <a:t>5</a:t>
+              <a:t>53</a:t>
             </a:fld>
             <a:endParaRPr lang="en-US"/>
           </a:p>
@@ -19971,9 +21414,9 @@
 </p:sld>
 </file>
 
-<file path=ppt/slides/slide50.xml><?xml version="1.0" encoding="utf-8"?>
+<file path=ppt/slides/slide54.xml><?xml version="1.0" encoding="utf-8"?>
 <p:sld xmlns:a="http://schemas.openxmlformats.org/drawingml/2006/main" xmlns:r="http://schemas.openxmlformats.org/officeDocument/2006/relationships" xmlns:p="http://schemas.openxmlformats.org/presentationml/2006/main">
-  <p:cSld name="Slide 50">
+  <p:cSld name="Slide 54">
     <p:spTree>
       <p:nvGrpSpPr>
         <p:cNvPr id="1" name=""/>
@@ -20021,7 +21464,7 @@
                 <a:ea typeface="Calibri" pitchFamily="34" charset="-122"/>
                 <a:cs typeface="Calibri" pitchFamily="34" charset="-120"/>
               </a:rPr>
-              <a:t>TEACHER'S NOTE</a:t>
+              <a:t>REFERENCES</a:t>
             </a:r>
             <a:endParaRPr lang="en-US" sz="1400" dirty="0"/>
           </a:p>
@@ -20086,7 +21529,7 @@
                 <a:ea typeface="Times New Roman" pitchFamily="34" charset="-122"/>
                 <a:cs typeface="Times New Roman" pitchFamily="34" charset="-120"/>
               </a:rPr>
-              <a:t>Teacher's Note</a:t>
+              <a:t>References</a:t>
             </a:r>
             <a:endParaRPr lang="en-US" sz="3600" dirty="0"/>
           </a:p>
@@ -20121,7 +21564,7 @@
               <a:buChar char="•"/>
             </a:pPr>
             <a:r>
-              <a:rPr lang="en-US" sz="2000" dirty="0">
+              <a:rPr lang="en-US" sz="1800" dirty="0">
                 <a:solidFill>
                   <a:srgbClr val="111111"/>
                 </a:solidFill>
@@ -20129,9 +21572,9 @@
                 <a:ea typeface="Calibri" pitchFamily="34" charset="-122"/>
                 <a:cs typeface="Calibri" pitchFamily="34" charset="-120"/>
               </a:rPr>
-              <a:t>Timing: Homework correction, plan, objectives 8 min | Recall, situation, action 10 min | 5 activities 30 min | Board summary (copying) 30 min | Evaluation, remediation 10 min | Homework, next lesson 5 min | Logbook 7 min</a:t>
-            </a:r>
-            <a:endParaRPr lang="en-US" sz="2000" dirty="0"/>
+              <a:t>Harmonised Progression Sheet, Economic Geography (5051), Form 2.</a:t>
+            </a:r>
+            <a:endParaRPr lang="en-US" sz="1800" dirty="0"/>
           </a:p>
           <a:p>
             <a:pPr algn="l" marL="342900" indent="-342900">
@@ -20142,7 +21585,7 @@
               <a:buChar char="•"/>
             </a:pPr>
             <a:r>
-              <a:rPr lang="en-US" sz="2000" dirty="0">
+              <a:rPr lang="en-US" sz="1800" dirty="0">
                 <a:solidFill>
                   <a:srgbClr val="111111"/>
                 </a:solidFill>
@@ -20150,9 +21593,9 @@
                 <a:ea typeface="Calibri" pitchFamily="34" charset="-122"/>
                 <a:cs typeface="Calibri" pitchFamily="34" charset="-120"/>
               </a:rPr>
-              <a:t>Without the projector (Activity 1): ask learners how far their family goes to get water.</a:t>
-            </a:r>
-            <a:endParaRPr lang="en-US" sz="2000" dirty="0"/>
+              <a:t>Class textbook: The major biomes of the world (hot deserts).</a:t>
+            </a:r>
+            <a:endParaRPr lang="en-US" sz="1800" dirty="0"/>
           </a:p>
           <a:p>
             <a:pPr algn="l" marL="342900" indent="-342900">
@@ -20163,7 +21606,7 @@
               <a:buChar char="•"/>
             </a:pPr>
             <a:r>
-              <a:rPr lang="en-US" sz="2000" dirty="0">
+              <a:rPr lang="en-US" sz="1800" dirty="0">
                 <a:solidFill>
                   <a:srgbClr val="111111"/>
                 </a:solidFill>
@@ -20171,9 +21614,9 @@
                 <a:ea typeface="Calibri" pitchFamily="34" charset="-122"/>
                 <a:cs typeface="Calibri" pitchFamily="34" charset="-120"/>
               </a:rPr>
-              <a:t>Without the projector (Activity 2): describe a road covered with sand after a sandstorm.</a:t>
-            </a:r>
-            <a:endParaRPr lang="en-US" sz="2000" dirty="0"/>
+              <a:t>Photo, Activity 1: “Well in the desert” by Focx Photography, CC BY-SA 2.0, via Flickr (https://www.flickr.com/photos/30780900@N02/4117141154)</a:t>
+            </a:r>
+            <a:endParaRPr lang="en-US" sz="1800" dirty="0"/>
           </a:p>
           <a:p>
             <a:pPr algn="l" marL="342900" indent="-342900">
@@ -20184,7 +21627,7 @@
               <a:buChar char="•"/>
             </a:pPr>
             <a:r>
-              <a:rPr lang="en-US" sz="2000" dirty="0">
+              <a:rPr lang="en-US" sz="1800" dirty="0">
                 <a:solidFill>
                   <a:srgbClr val="111111"/>
                 </a:solidFill>
@@ -20192,9 +21635,9 @@
                 <a:ea typeface="Calibri" pitchFamily="34" charset="-122"/>
                 <a:cs typeface="Calibri" pitchFamily="34" charset="-120"/>
               </a:rPr>
-              <a:t>Without the projector (Activity 3): ask learners where they have seen camels (Far North).</a:t>
-            </a:r>
-            <a:endParaRPr lang="en-US" sz="2000" dirty="0"/>
+              <a:t>Photo, Activity 2: “Mesquite Flat Dunes at Sunrise, Death Valley National Park, California” by Raj Hanchanahal Photography, CC BY-NC-ND 2.0, via Flickr (https://www.flickr.com/photos/32684709@N03/3873091107)</a:t>
+            </a:r>
+            <a:endParaRPr lang="en-US" sz="1800" dirty="0"/>
           </a:p>
           <a:p>
             <a:pPr algn="l" marL="342900" indent="-342900">
@@ -20205,7 +21648,7 @@
               <a:buChar char="•"/>
             </a:pPr>
             <a:r>
-              <a:rPr lang="en-US" sz="2000" dirty="0">
+              <a:rPr lang="en-US" sz="1800" dirty="0">
                 <a:solidFill>
                   <a:srgbClr val="111111"/>
                 </a:solidFill>
@@ -20213,9 +21656,9 @@
                 <a:ea typeface="Calibri" pitchFamily="34" charset="-122"/>
                 <a:cs typeface="Calibri" pitchFamily="34" charset="-120"/>
               </a:rPr>
-              <a:t>Without the projector (Activity 4): compare with the clothes worn in Garoua in the dry season.</a:t>
-            </a:r>
-            <a:endParaRPr lang="en-US" sz="2000" dirty="0"/>
+              <a:t>Photo, Activity 3: “Merzouga desert, Morocco” by Mycroyance, CC BY-ND 2.0, via Flickr (https://www.flickr.com/photos/91155980@N07/13157027505)</a:t>
+            </a:r>
+            <a:endParaRPr lang="en-US" sz="1800" dirty="0"/>
           </a:p>
           <a:p>
             <a:pPr algn="l" marL="342900" indent="-342900">
@@ -20226,7 +21669,7 @@
               <a:buChar char="•"/>
             </a:pPr>
             <a:r>
-              <a:rPr lang="en-US" sz="2000" dirty="0">
+              <a:rPr lang="en-US" sz="1800" dirty="0">
                 <a:solidFill>
                   <a:srgbClr val="111111"/>
                 </a:solidFill>
@@ -20234,9 +21677,30 @@
                 <a:ea typeface="Calibri" pitchFamily="34" charset="-122"/>
                 <a:cs typeface="Calibri" pitchFamily="34" charset="-120"/>
               </a:rPr>
-              <a:t>Without the projector (Activity 5): explain that sea water is boiled or filtered to remove the salt.</a:t>
-            </a:r>
-            <a:endParaRPr lang="en-US" sz="2000" dirty="0"/>
+              <a:t>Photo, Activity 4: “my neighbor” by Emilia Tjernström [Arriving at the horizon], CC BY-NC-SA 2.0, via Flickr (https://www.flickr.com/photos/60614633@N00/502315074)</a:t>
+            </a:r>
+            <a:endParaRPr lang="en-US" sz="1800" dirty="0"/>
+          </a:p>
+          <a:p>
+            <a:pPr algn="l" marL="342900" indent="-342900">
+              <a:spcAft>
+                <a:spcPts val="800"/>
+              </a:spcAft>
+              <a:buSzPct val="100000"/>
+              <a:buChar char="•"/>
+            </a:pPr>
+            <a:r>
+              <a:rPr lang="en-US" sz="1800" dirty="0">
+                <a:solidFill>
+                  <a:srgbClr val="111111"/>
+                </a:solidFill>
+                <a:latin typeface="Calibri" pitchFamily="34" charset="0"/>
+                <a:ea typeface="Calibri" pitchFamily="34" charset="-122"/>
+                <a:cs typeface="Calibri" pitchFamily="34" charset="-120"/>
+              </a:rPr>
+              <a:t>Photo, Activity 5: “Desalinization plant at Guantanamo Bay, Cuba” by U.S. Navy Seabee Museum, CC BY 2.0, via Flickr (https://www.flickr.com/photos/60248384@N05/6847412393)</a:t>
+            </a:r>
+            <a:endParaRPr lang="en-US" sz="1800" dirty="0"/>
           </a:p>
         </p:txBody>
       </p:sp>
@@ -20282,7 +21746,7 @@
             <a:pPr algn="ctr"/>
             <a:fld id="{F7021451-1387-4CA6-816F-3879F97B5CBC}" type="slidenum">
               <a:rPr b="1" lang="en-US"/>
-              <a:t>50</a:t>
+              <a:t>54</a:t>
             </a:fld>
             <a:endParaRPr lang="en-US"/>
           </a:p>
@@ -20296,9 +21760,9 @@
 </p:sld>
 </file>
 
-<file path=ppt/slides/slide51.xml><?xml version="1.0" encoding="utf-8"?>
+<file path=ppt/slides/slide55.xml><?xml version="1.0" encoding="utf-8"?>
 <p:sld xmlns:a="http://schemas.openxmlformats.org/drawingml/2006/main" xmlns:r="http://schemas.openxmlformats.org/officeDocument/2006/relationships" xmlns:p="http://schemas.openxmlformats.org/presentationml/2006/main">
-  <p:cSld name="Slide 51">
+  <p:cSld name="Slide 55">
     <p:spTree>
       <p:nvGrpSpPr>
         <p:cNvPr id="1" name=""/>
@@ -20369,7 +21833,7 @@
         <p:spPr>
           <a:xfrm>
             <a:off x="0" y="658368"/>
-            <a:ext cx="2468880" cy="5833872"/>
+            <a:ext cx="5120640" cy="5833872"/>
           </a:xfrm>
           <a:prstGeom prst="rect">
             <a:avLst/>
@@ -20384,8 +21848,8 @@
         </p:nvSpPr>
         <p:spPr>
           <a:xfrm>
-            <a:off x="2697480" y="1005840"/>
-            <a:ext cx="9174175" cy="731520"/>
+            <a:off x="5349240" y="1005840"/>
+            <a:ext cx="6522415" cy="731520"/>
           </a:xfrm>
           <a:prstGeom prst="rect">
             <a:avLst/>
@@ -20411,7 +21875,7 @@
                 <a:ea typeface="Times New Roman" pitchFamily="34" charset="-122"/>
                 <a:cs typeface="Times New Roman" pitchFamily="34" charset="-120"/>
               </a:rPr>
-              <a:t>References</a:t>
+              <a:t>References (continued)</a:t>
             </a:r>
             <a:endParaRPr lang="en-US" sz="3600" dirty="0"/>
           </a:p>
@@ -20425,8 +21889,8 @@
         </p:nvSpPr>
         <p:spPr>
           <a:xfrm>
-            <a:off x="2697480" y="1783080"/>
-            <a:ext cx="9174175" cy="4663440"/>
+            <a:off x="5349240" y="1783080"/>
+            <a:ext cx="6522415" cy="4663440"/>
           </a:xfrm>
           <a:prstGeom prst="rect">
             <a:avLst/>
@@ -20454,133 +21918,7 @@
                 <a:ea typeface="Calibri" pitchFamily="34" charset="-122"/>
                 <a:cs typeface="Calibri" pitchFamily="34" charset="-120"/>
               </a:rPr>
-              <a:t>Harmonised Progression Sheet, Economic Geography (5051), Form 2.</a:t>
-            </a:r>
-            <a:endParaRPr lang="en-US" sz="1800" dirty="0"/>
-          </a:p>
-          <a:p>
-            <a:pPr algn="l" marL="342900" indent="-342900">
-              <a:spcAft>
-                <a:spcPts val="800"/>
-              </a:spcAft>
-              <a:buSzPct val="100000"/>
-              <a:buChar char="•"/>
-            </a:pPr>
-            <a:r>
-              <a:rPr lang="en-US" sz="1800" dirty="0">
-                <a:solidFill>
-                  <a:srgbClr val="111111"/>
-                </a:solidFill>
-                <a:latin typeface="Calibri" pitchFamily="34" charset="0"/>
-                <a:ea typeface="Calibri" pitchFamily="34" charset="-122"/>
-                <a:cs typeface="Calibri" pitchFamily="34" charset="-120"/>
-              </a:rPr>
-              <a:t>Class textbook: The major biomes of the world (hot deserts).</a:t>
-            </a:r>
-            <a:endParaRPr lang="en-US" sz="1800" dirty="0"/>
-          </a:p>
-          <a:p>
-            <a:pPr algn="l" marL="342900" indent="-342900">
-              <a:spcAft>
-                <a:spcPts val="800"/>
-              </a:spcAft>
-              <a:buSzPct val="100000"/>
-              <a:buChar char="•"/>
-            </a:pPr>
-            <a:r>
-              <a:rPr lang="en-US" sz="1800" dirty="0">
-                <a:solidFill>
-                  <a:srgbClr val="111111"/>
-                </a:solidFill>
-                <a:latin typeface="Calibri" pitchFamily="34" charset="0"/>
-                <a:ea typeface="Calibri" pitchFamily="34" charset="-122"/>
-                <a:cs typeface="Calibri" pitchFamily="34" charset="-120"/>
-              </a:rPr>
-              <a:t>Photo, Activity 1: “Well in the desert” by Focx Photography, CC BY-SA 2.0, via Flickr (https://www.flickr.com/photos/30780900@N02/4117141154)</a:t>
-            </a:r>
-            <a:endParaRPr lang="en-US" sz="1800" dirty="0"/>
-          </a:p>
-          <a:p>
-            <a:pPr algn="l" marL="342900" indent="-342900">
-              <a:spcAft>
-                <a:spcPts val="800"/>
-              </a:spcAft>
-              <a:buSzPct val="100000"/>
-              <a:buChar char="•"/>
-            </a:pPr>
-            <a:r>
-              <a:rPr lang="en-US" sz="1800" dirty="0">
-                <a:solidFill>
-                  <a:srgbClr val="111111"/>
-                </a:solidFill>
-                <a:latin typeface="Calibri" pitchFamily="34" charset="0"/>
-                <a:ea typeface="Calibri" pitchFamily="34" charset="-122"/>
-                <a:cs typeface="Calibri" pitchFamily="34" charset="-120"/>
-              </a:rPr>
-              <a:t>Photo, Activity 2: “Mesquite Flat Dunes at Sunrise, Death Valley National Park, California” by Raj Hanchanahal Photography, CC BY-NC-ND 2.0, via Flickr (https://www.flickr.com/photos/32684709@N03/3873091107)</a:t>
-            </a:r>
-            <a:endParaRPr lang="en-US" sz="1800" dirty="0"/>
-          </a:p>
-          <a:p>
-            <a:pPr algn="l" marL="342900" indent="-342900">
-              <a:spcAft>
-                <a:spcPts val="800"/>
-              </a:spcAft>
-              <a:buSzPct val="100000"/>
-              <a:buChar char="•"/>
-            </a:pPr>
-            <a:r>
-              <a:rPr lang="en-US" sz="1800" dirty="0">
-                <a:solidFill>
-                  <a:srgbClr val="111111"/>
-                </a:solidFill>
-                <a:latin typeface="Calibri" pitchFamily="34" charset="0"/>
-                <a:ea typeface="Calibri" pitchFamily="34" charset="-122"/>
-                <a:cs typeface="Calibri" pitchFamily="34" charset="-120"/>
-              </a:rPr>
-              <a:t>Photo, Activity 3: “Merzouga desert, Morocco” by Mycroyance, CC BY-ND 2.0, via Flickr (https://www.flickr.com/photos/91155980@N07/13157027505)</a:t>
-            </a:r>
-            <a:endParaRPr lang="en-US" sz="1800" dirty="0"/>
-          </a:p>
-          <a:p>
-            <a:pPr algn="l" marL="342900" indent="-342900">
-              <a:spcAft>
-                <a:spcPts val="800"/>
-              </a:spcAft>
-              <a:buSzPct val="100000"/>
-              <a:buChar char="•"/>
-            </a:pPr>
-            <a:r>
-              <a:rPr lang="en-US" sz="1800" dirty="0">
-                <a:solidFill>
-                  <a:srgbClr val="111111"/>
-                </a:solidFill>
-                <a:latin typeface="Calibri" pitchFamily="34" charset="0"/>
-                <a:ea typeface="Calibri" pitchFamily="34" charset="-122"/>
-                <a:cs typeface="Calibri" pitchFamily="34" charset="-120"/>
-              </a:rPr>
-              <a:t>Photo, Activity 4: “my neighbor” by Emilia Tjernström [Arriving at the horizon], CC BY-NC-SA 2.0, via Flickr (https://www.flickr.com/photos/60614633@N00/502315074)</a:t>
-            </a:r>
-            <a:endParaRPr lang="en-US" sz="1800" dirty="0"/>
-          </a:p>
-          <a:p>
-            <a:pPr algn="l" marL="342900" indent="-342900">
-              <a:spcAft>
-                <a:spcPts val="800"/>
-              </a:spcAft>
-              <a:buSzPct val="100000"/>
-              <a:buChar char="•"/>
-            </a:pPr>
-            <a:r>
-              <a:rPr lang="en-US" sz="1800" dirty="0">
-                <a:solidFill>
-                  <a:srgbClr val="111111"/>
-                </a:solidFill>
-                <a:latin typeface="Calibri" pitchFamily="34" charset="0"/>
-                <a:ea typeface="Calibri" pitchFamily="34" charset="-122"/>
-                <a:cs typeface="Calibri" pitchFamily="34" charset="-120"/>
-              </a:rPr>
-              <a:t>Photo, Activity 5: “Desalinization plant at Guantanamo Bay, Cuba” by U.S. Navy Seabee Museum, CC BY 2.0, via Flickr (https://www.flickr.com/photos/60248384@N05/6847412393)</a:t>
+              <a:t>Diagrams and animations: drawn for this lesson (Geography Department).</a:t>
             </a:r>
             <a:endParaRPr lang="en-US" sz="1800" dirty="0"/>
           </a:p>
@@ -20628,227 +21966,7 @@
             <a:pPr algn="ctr"/>
             <a:fld id="{F7021451-1387-4CA6-816F-3879F97B5CBC}" type="slidenum">
               <a:rPr b="1" lang="en-US"/>
-              <a:t>51</a:t>
-            </a:fld>
-            <a:endParaRPr lang="en-US"/>
-          </a:p>
-        </p:txBody>
-      </p:sp>
-    </p:spTree>
-  </p:cSld>
-  <p:clrMapOvr>
-    <a:masterClrMapping/>
-  </p:clrMapOvr>
-</p:sld>
-</file>
-
-<file path=ppt/slides/slide52.xml><?xml version="1.0" encoding="utf-8"?>
-<p:sld xmlns:a="http://schemas.openxmlformats.org/drawingml/2006/main" xmlns:r="http://schemas.openxmlformats.org/officeDocument/2006/relationships" xmlns:p="http://schemas.openxmlformats.org/presentationml/2006/main">
-  <p:cSld name="Slide 52">
-    <p:spTree>
-      <p:nvGrpSpPr>
-        <p:cNvPr id="1" name=""/>
-        <p:cNvGrpSpPr/>
-        <p:nvPr/>
-      </p:nvGrpSpPr>
-      <p:grpSpPr>
-        <a:xfrm>
-          <a:off x="0" y="0"/>
-          <a:ext cx="0" cy="0"/>
-          <a:chOff x="0" y="0"/>
-          <a:chExt cx="0" cy="0"/>
-        </a:xfrm>
-      </p:grpSpPr>
-      <p:sp>
-        <p:nvSpPr>
-          <p:cNvPr id="2" name="Text 0"/>
-          <p:cNvSpPr/>
-          <p:nvPr/>
-        </p:nvSpPr>
-        <p:spPr>
-          <a:xfrm>
-            <a:off x="457200" y="713232"/>
-            <a:ext cx="11368735" cy="274320"/>
-          </a:xfrm>
-          <a:prstGeom prst="rect">
-            <a:avLst/>
-          </a:prstGeom>
-          <a:noFill/>
-          <a:ln/>
-        </p:spPr>
-        <p:txBody>
-          <a:bodyPr wrap="square" lIns="0" tIns="0" rIns="0" bIns="0" rtlCol="0" anchor="ctr"/>
-          <a:lstStyle/>
-          <a:p>
-            <a:pPr algn="r" indent="0" marL="0">
-              <a:buNone/>
-            </a:pPr>
-            <a:r>
-              <a:rPr lang="en-US" sz="1400" b="1" dirty="0">
-                <a:solidFill>
-                  <a:srgbClr val="1C3F6E"/>
-                </a:solidFill>
-                <a:latin typeface="Calibri" pitchFamily="34" charset="0"/>
-                <a:ea typeface="Calibri" pitchFamily="34" charset="-122"/>
-                <a:cs typeface="Calibri" pitchFamily="34" charset="-120"/>
-              </a:rPr>
-              <a:t>REFERENCES</a:t>
-            </a:r>
-            <a:endParaRPr lang="en-US" sz="1400" dirty="0"/>
-          </a:p>
-        </p:txBody>
-      </p:sp>
-      <p:pic>
-        <p:nvPicPr>
-          <p:cNvPr id="3" name="Image 0" descr="/home/claude/f4/img/minesec_sheet.png">    </p:cNvPr>
-          <p:cNvPicPr>
-            <a:picLocks noChangeAspect="1"/>
-          </p:cNvPicPr>
-          <p:nvPr/>
-        </p:nvPicPr>
-        <p:blipFill>
-          <a:blip r:embed="rId1"/>
-          <a:stretch>
-            <a:fillRect/>
-          </a:stretch>
-        </p:blipFill>
-        <p:spPr>
-          <a:xfrm>
-            <a:off x="0" y="658368"/>
-            <a:ext cx="5120640" cy="5833872"/>
-          </a:xfrm>
-          <a:prstGeom prst="rect">
-            <a:avLst/>
-          </a:prstGeom>
-        </p:spPr>
-      </p:pic>
-      <p:sp>
-        <p:nvSpPr>
-          <p:cNvPr id="4" name="Text 1"/>
-          <p:cNvSpPr/>
-          <p:nvPr/>
-        </p:nvSpPr>
-        <p:spPr>
-          <a:xfrm>
-            <a:off x="5349240" y="1005840"/>
-            <a:ext cx="6522415" cy="731520"/>
-          </a:xfrm>
-          <a:prstGeom prst="rect">
-            <a:avLst/>
-          </a:prstGeom>
-          <a:noFill/>
-          <a:ln/>
-        </p:spPr>
-        <p:txBody>
-          <a:bodyPr wrap="square" lIns="0" tIns="0" rIns="0" bIns="0" rtlCol="0" anchor="ctr">
-            <a:normAutofit/>
-          </a:bodyPr>
-          <a:lstStyle/>
-          <a:p>
-            <a:pPr algn="ctr" indent="0" marL="0">
-              <a:buNone/>
-            </a:pPr>
-            <a:r>
-              <a:rPr lang="en-US" sz="3600" b="1" dirty="0">
-                <a:solidFill>
-                  <a:srgbClr val="990011"/>
-                </a:solidFill>
-                <a:latin typeface="Times New Roman" pitchFamily="34" charset="0"/>
-                <a:ea typeface="Times New Roman" pitchFamily="34" charset="-122"/>
-                <a:cs typeface="Times New Roman" pitchFamily="34" charset="-120"/>
-              </a:rPr>
-              <a:t>References (continued)</a:t>
-            </a:r>
-            <a:endParaRPr lang="en-US" sz="3600" dirty="0"/>
-          </a:p>
-        </p:txBody>
-      </p:sp>
-      <p:sp>
-        <p:nvSpPr>
-          <p:cNvPr id="5" name="Text 2"/>
-          <p:cNvSpPr/>
-          <p:nvPr/>
-        </p:nvSpPr>
-        <p:spPr>
-          <a:xfrm>
-            <a:off x="5349240" y="1783080"/>
-            <a:ext cx="6522415" cy="4663440"/>
-          </a:xfrm>
-          <a:prstGeom prst="rect">
-            <a:avLst/>
-          </a:prstGeom>
-          <a:noFill/>
-          <a:ln/>
-        </p:spPr>
-        <p:txBody>
-          <a:bodyPr wrap="square" lIns="0" tIns="0" rIns="0" bIns="0" rtlCol="0" anchor="t"/>
-          <a:lstStyle/>
-          <a:p>
-            <a:pPr algn="l" marL="342900" indent="-342900">
-              <a:spcAft>
-                <a:spcPts val="800"/>
-              </a:spcAft>
-              <a:buSzPct val="100000"/>
-              <a:buChar char="•"/>
-            </a:pPr>
-            <a:r>
-              <a:rPr lang="en-US" sz="1800" dirty="0">
-                <a:solidFill>
-                  <a:srgbClr val="111111"/>
-                </a:solidFill>
-                <a:latin typeface="Calibri" pitchFamily="34" charset="0"/>
-                <a:ea typeface="Calibri" pitchFamily="34" charset="-122"/>
-                <a:cs typeface="Calibri" pitchFamily="34" charset="-120"/>
-              </a:rPr>
-              <a:t>Diagrams and animations: drawn for this lesson (Geography Department).</a:t>
-            </a:r>
-            <a:endParaRPr lang="en-US" sz="1800" dirty="0"/>
-          </a:p>
-        </p:txBody>
-      </p:sp>
-      <p:sp>
-        <p:nvSpPr>
-          <p:cNvPr id="25" name="Slide Number Placeholder 0"/>
-          <p:cNvSpPr>
-            <a:spLocks noGrp="1"/>
-          </p:cNvSpPr>
-          <p:nvPr>
-            <p:ph type="sldNum" sz="quarter" idx="4294967295"/>
-          </p:nvPr>
-        </p:nvSpPr>
-        <p:spPr>
-          <a:xfrm>
-            <a:off x="27432" y="91440"/>
-            <a:ext cx="585216" cy="475488"/>
-          </a:xfrm>
-          <a:prstGeom prst="rect">
-            <a:avLst/>
-          </a:prstGeom>
-          <a:extLst>
-            <a:ext uri="{C572A759-6A51-4108-AA02-DFA0A04FC94B}">
-              <ma14:wrappingTextBoxFlag xmlns:ma14="http://schemas.microsoft.com/office/mac/drawingml/2011/main" val="0"/>
-            </a:ext>
-          </a:extLst>
-        </p:spPr>
-        <p:txBody>
-          <a:bodyPr/>
-          <a:lstStyle>
-            <a:lvl1pPr>
-              <a:defRPr sz="2000">
-                <a:solidFill>
-                  <a:srgbClr val="FFFFFF"/>
-                </a:solidFill>
-                <a:latin typeface="Calibri"/>
-                <a:ea typeface="Calibri"/>
-                <a:cs typeface="Calibri"/>
-              </a:defRPr>
-            </a:lvl1pPr>
-          </a:lstStyle>
-          <a:p>
-            <a:pPr algn="ctr"/>
-            <a:fld id="{F7021451-1387-4CA6-816F-3879F97B5CBC}" type="slidenum">
-              <a:rPr b="1" lang="en-US"/>
-              <a:t>52</a:t>
+              <a:t>55</a:t>
             </a:fld>
             <a:endParaRPr lang="en-US"/>
           </a:p>

--- a/lecons/F2T/14_S08_L3_P4_Desert_Problems_Adaptations.pptx
+++ b/lecons/F2T/14_S08_L3_P4_Desert_Problems_Adaptations.pptx
@@ -3460,7 +3460,7 @@
           <a:p>
             <a:r>
               <a:rPr lang="en-US" dirty="0"/>
-              <a:t>Before we start the new lesson, let us correct the homework I gave you at the end of Lesson 3 (Part 3): The Desert Regions: Characteristics (Soils and Vegetation). The question was: Imagine you must spend one week in the Sahara. Write down three problems you would face and one way to solve each. Take out your exercise books.</a:t>
+              <a:t>Before we start the new lesson, let us correct the homework I gave you at the end of Lesson 3 (Part 3): The Desert Regions: Characteristics (Soils and Vegetation). The question was: Give two problems of people in hot deserts. Take out your exercise books.</a:t>
             </a:r>
             <a:endParaRPr lang="en-US" dirty="0"/>
           </a:p>
@@ -4252,7 +4252,7 @@
           <a:p>
             <a:r>
               <a:rPr lang="en-US" dirty="0"/>
-              <a:t>For your homework: Find in your textbook or atlas the name of one oasis in the Sahara, and write the name of the country where it is found. We shall correct it at the beginning of our next lesson.</a:t>
+              <a:t>For your homework: Define an oasis. We shall correct it at the beginning of our next lesson.</a:t>
             </a:r>
             <a:endParaRPr lang="en-US" dirty="0"/>
           </a:p>
@@ -4428,7 +4428,7 @@
           <a:p>
             <a:r>
               <a:rPr lang="en-US" dirty="0"/>
-              <a:t>Here is a good answer. Examples: lack of water (carry water and drink often); heat by day and cold at night (wear loose clothes by day and warm clothes at night); sandstorms (cover the face and shelter). Compare it with your own answer and correct your work in red.</a:t>
+              <a:t>Here is a good answer. Lack of water and sandstorms (also extreme temperatures). Compare it with your own answer and correct your work in red.</a:t>
             </a:r>
             <a:endParaRPr lang="en-US" dirty="0"/>
           </a:p>
@@ -15168,7 +15168,7 @@
         <p:spPr>
           <a:xfrm>
             <a:off x="0" y="658368"/>
-            <a:ext cx="3840480" cy="5833872"/>
+            <a:ext cx="5120640" cy="5833872"/>
           </a:xfrm>
           <a:prstGeom prst="rect">
             <a:avLst/>
@@ -15183,8 +15183,8 @@
         </p:nvSpPr>
         <p:spPr>
           <a:xfrm>
-            <a:off x="4069080" y="1005840"/>
-            <a:ext cx="7802575" cy="731520"/>
+            <a:off x="5349240" y="1005840"/>
+            <a:ext cx="6522415" cy="731520"/>
           </a:xfrm>
           <a:prstGeom prst="rect">
             <a:avLst/>
@@ -15224,8 +15224,8 @@
         </p:nvSpPr>
         <p:spPr>
           <a:xfrm>
-            <a:off x="4069080" y="1783080"/>
-            <a:ext cx="7802575" cy="4663440"/>
+            <a:off x="5349240" y="1783080"/>
+            <a:ext cx="6522415" cy="4663440"/>
           </a:xfrm>
           <a:prstGeom prst="rect">
             <a:avLst/>
@@ -15272,7 +15272,7 @@
                 <a:ea typeface="Times New Roman" pitchFamily="34" charset="-122"/>
                 <a:cs typeface="Times New Roman" pitchFamily="34" charset="-120"/>
               </a:rPr>
-              <a:t>Imagine you must spend one week in the Sahara. Write down three problems you would face and one way to solve each.</a:t>
+              <a:t>Give two problems of people in hot deserts.</a:t>
             </a:r>
             <a:endParaRPr lang="en-US" sz="4000" dirty="0"/>
           </a:p>
@@ -17542,7 +17542,7 @@
                 <a:ea typeface="Times New Roman" pitchFamily="34" charset="-122"/>
                 <a:cs typeface="Times New Roman" pitchFamily="34" charset="-120"/>
               </a:rPr>
-              <a:t>Find in your textbook or atlas the name of one oasis in the Sahara, and write the name of the country where it is found.</a:t>
+              <a:t>Define an oasis.</a:t>
             </a:r>
             <a:endParaRPr lang="en-US" sz="4000" dirty="0"/>
           </a:p>
@@ -18000,7 +18000,7 @@
                 <a:ea typeface="Times New Roman" pitchFamily="34" charset="-122"/>
                 <a:cs typeface="Times New Roman" pitchFamily="34" charset="-120"/>
               </a:rPr>
-              <a:t>Examples: lack of water (carry water and drink often); heat by day and cold at night (wear loose clothes by day and warm clothes at night); sandstorms (cover the face and shelter).</a:t>
+              <a:t>Lack of water and sandstorms (also extreme temperatures).</a:t>
             </a:r>
             <a:endParaRPr lang="en-US" sz="4000" dirty="0"/>
           </a:p>
@@ -20701,7 +20701,7 @@
                           <a:ea typeface="Calibri" pitchFamily="34" charset="-122"/>
                           <a:cs typeface="Calibri" pitchFamily="34" charset="-120"/>
                         </a:rPr>
-                        <a:t>Find in your textbook or atlas the name of one oasis in the Sahara, and write the name of the country where it is found.</a:t>
+                        <a:t>Define an oasis.</a:t>
                       </a:r>
                       <a:endParaRPr lang="en-US" sz="1600" dirty="0">
                         <a:latin typeface="Calibri" charset="0"/>
